--- a/slides-v2.pptx
+++ b/slides-v2.pptx
@@ -2093,7 +2093,7 @@
               <a:lstStyle/>
               <a:p>
                 <a:pPr>
-                  <a:defRPr b="0" i="0" strike="noStrike" sz="850" u="none">
+                  <a:defRPr b="0" i="0" strike="noStrike" sz="900" u="none">
                     <a:solidFill>
                       <a:srgbClr val="0B0B0B"/>
                     </a:solidFill>
@@ -2181,7 +2181,7 @@
               <c:strCache>
                 <c:ptCount val="1"/>
                 <c:pt idx="0">
-                  <c:v>포괄</c:v>
+                  <c:v>일반</c:v>
                 </c:pt>
               </c:strCache>
             </c:strRef>
@@ -2200,7 +2200,7 @@
               <a:lstStyle/>
               <a:p>
                 <a:pPr>
-                  <a:defRPr b="0" i="0" strike="noStrike" sz="850" u="none">
+                  <a:defRPr b="0" i="0" strike="noStrike" sz="900" u="none">
                     <a:solidFill>
                       <a:srgbClr val="0B0B0B"/>
                     </a:solidFill>
@@ -2286,7 +2286,7 @@
             <a:lstStyle/>
             <a:p>
               <a:pPr>
-                <a:defRPr b="0" i="0" strike="noStrike" sz="850" u="none">
+                <a:defRPr b="0" i="0" strike="noStrike" sz="900" u="none">
                   <a:solidFill>
                     <a:srgbClr val="0B0B0B"/>
                   </a:solidFill>
@@ -2332,7 +2332,7 @@
           <a:lstStyle/>
           <a:p>
             <a:pPr>
-              <a:defRPr sz="800" b="0" i="0" u="none" strike="noStrike">
+              <a:defRPr sz="850" b="0" i="0" u="none" strike="noStrike">
                 <a:solidFill>
                   <a:srgbClr val="52514E"/>
                 </a:solidFill>
@@ -2461,7 +2461,7 @@
               <a:lstStyle/>
               <a:p>
                 <a:pPr>
-                  <a:defRPr b="0" i="0" strike="noStrike" sz="700" u="none">
+                  <a:defRPr b="0" i="0" strike="noStrike" sz="850" u="none">
                     <a:solidFill>
                       <a:srgbClr val="0B0B0B"/>
                     </a:solidFill>
@@ -2550,7 +2550,7 @@
               <a:lstStyle/>
               <a:p>
                 <a:pPr>
-                  <a:defRPr b="0" i="0" strike="noStrike" sz="700" u="none">
+                  <a:defRPr b="0" i="0" strike="noStrike" sz="850" u="none">
                     <a:solidFill>
                       <a:srgbClr val="0B0B0B"/>
                     </a:solidFill>
@@ -2618,7 +2618,7 @@
             <a:lstStyle/>
             <a:p>
               <a:pPr>
-                <a:defRPr b="0" i="0" strike="noStrike" sz="700" u="none">
+                <a:defRPr b="0" i="0" strike="noStrike" sz="850" u="none">
                   <a:solidFill>
                     <a:srgbClr val="0B0B0B"/>
                   </a:solidFill>
@@ -2664,7 +2664,7 @@
           <a:lstStyle/>
           <a:p>
             <a:pPr>
-              <a:defRPr sz="650" b="0" i="0" u="none" strike="noStrike">
+              <a:defRPr sz="750" b="0" i="0" u="none" strike="noStrike">
                 <a:solidFill>
                   <a:srgbClr val="52514E"/>
                 </a:solidFill>
@@ -2731,6 +2731,23 @@
         <a:effectLst/>
       </c:spPr>
     </c:plotArea>
+    <c:legend>
+      <c:legendPos val="b"/>
+      <c:overlay val="0"/>
+      <c:txPr>
+        <a:bodyPr/>
+        <a:lstStyle/>
+        <a:p>
+          <a:pPr>
+            <a:defRPr sz="800">
+              <a:latin typeface="Malgun Gothic"/>
+              <a:cs typeface="Malgun Gothic"/>
+            </a:defRPr>
+          </a:pPr>
+          <a:endParaRPr lang="en-US"/>
+        </a:p>
+      </c:txPr>
+    </c:legend>
     <c:plotVisOnly val="1"/>
     <c:dispBlanksAs val="span"/>
   </c:chart>
@@ -4416,7 +4433,7 @@
         <p:spPr>
           <a:xfrm>
             <a:off x="411480" y="658368"/>
-            <a:ext cx="8321040" cy="457200"/>
+            <a:ext cx="8321040" cy="329184"/>
           </a:xfrm>
           <a:prstGeom prst="rect">
             <a:avLst/>
@@ -4441,7 +4458,7 @@
         <p:spPr>
           <a:xfrm>
             <a:off x="521208" y="658368"/>
-            <a:ext cx="8101584" cy="457200"/>
+            <a:ext cx="8101584" cy="329184"/>
           </a:xfrm>
           <a:prstGeom prst="rect">
             <a:avLst/>
@@ -4457,7 +4474,7 @@
               <a:buNone/>
             </a:pPr>
             <a:r>
-              <a:rPr lang="en-US" sz="950" b="1" dirty="0">
+              <a:rPr lang="en-US" sz="1000" b="1" dirty="0">
                 <a:solidFill>
                   <a:srgbClr val="2A78D6"/>
                 </a:solidFill>
@@ -4471,7 +4488,7 @@
               <a:buNone/>
             </a:pPr>
             <a:r>
-              <a:rPr lang="en-US" sz="950" dirty="0">
+              <a:rPr lang="en-US" sz="1000" dirty="0">
                 <a:solidFill>
                   <a:srgbClr val="0B0B0B"/>
                 </a:solidFill>
@@ -4479,40 +4496,9 @@
                 <a:ea typeface="Malgun Gothic" pitchFamily="34" charset="-122"/>
                 <a:cs typeface="Malgun Gothic" pitchFamily="34" charset="-120"/>
               </a:rPr>
-              <a:t>특허사무소 무료진단 랜딩 사이트의 방문자수·광고 데이터 분석 → 랜딩 사이트 개선, 광고 개선</a:t>
-            </a:r>
-            <a:endParaRPr lang="en-US" sz="950" dirty="0"/>
-          </a:p>
-          <a:p>
-            <a:pPr indent="0" marL="0">
-              <a:buNone/>
-            </a:pPr>
-            <a:r>
-              <a:rPr lang="en-US" sz="950" b="1" dirty="0">
-                <a:solidFill>
-                  <a:srgbClr val="2A78D6"/>
-                </a:solidFill>
-                <a:latin typeface="Malgun Gothic" pitchFamily="34" charset="0"/>
-                <a:ea typeface="Malgun Gothic" pitchFamily="34" charset="-122"/>
-                <a:cs typeface="Malgun Gothic" pitchFamily="34" charset="-120"/>
-              </a:rPr>
-              <a:t>보안  </a:t>
-            </a:r>
-            <a:pPr indent="0" marL="0">
-              <a:buNone/>
-            </a:pPr>
-            <a:r>
-              <a:rPr lang="en-US" sz="950" dirty="0">
-                <a:solidFill>
-                  <a:srgbClr val="0B0B0B"/>
-                </a:solidFill>
-                <a:latin typeface="Malgun Gothic" pitchFamily="34" charset="0"/>
-                <a:ea typeface="Malgun Gothic" pitchFamily="34" charset="-122"/>
-                <a:cs typeface="Malgun Gothic" pitchFamily="34" charset="-120"/>
-              </a:rPr>
-              <a:t>원데이터는 공개하지 않고 집계값만. 상호명과 개인정보는 가림</a:t>
-            </a:r>
-            <a:endParaRPr lang="en-US" sz="950" dirty="0"/>
+              <a:t>특허사무소 무료진단 랜딩 사이트의 방문자수 분석, 광고 데이터 분석 → 랜딩 사이트 개선, 광고 개선</a:t>
+            </a:r>
+            <a:endParaRPr lang="en-US" sz="1000" dirty="0"/>
           </a:p>
         </p:txBody>
       </p:sp>
@@ -4524,7 +4510,7 @@
         </p:nvSpPr>
         <p:spPr>
           <a:xfrm>
-            <a:off x="411480" y="1207008"/>
+            <a:off x="411480" y="1097280"/>
             <a:ext cx="8321040" cy="219456"/>
           </a:xfrm>
           <a:prstGeom prst="rect">
@@ -4549,7 +4535,7 @@
                 <a:ea typeface="Malgun Gothic" pitchFamily="34" charset="-122"/>
                 <a:cs typeface="Malgun Gothic" pitchFamily="34" charset="-120"/>
               </a:rPr>
-              <a:t>총 매출 = 방문수 × 방문당 신청률 × 수임 전환율 × 수임당 매출  — 칸마다 데이터가 왜 어려운가</a:t>
+              <a:t>총 매출 = 방문수 → 방문당 신청률 → 수임 전환율 → 수임당 매출   (칸마다 왜 분석이 어려운가)</a:t>
             </a:r>
             <a:endParaRPr lang="en-US" sz="950" dirty="0"/>
           </a:p>
@@ -4563,7 +4549,7 @@
         </p:nvSpPr>
         <p:spPr>
           <a:xfrm>
-            <a:off x="411480" y="1444752"/>
+            <a:off x="411480" y="1335024"/>
             <a:ext cx="1977390" cy="658368"/>
           </a:xfrm>
           <a:prstGeom prst="rect">
@@ -4588,7 +4574,7 @@
         </p:nvSpPr>
         <p:spPr>
           <a:xfrm>
-            <a:off x="484632" y="1463040"/>
+            <a:off x="484632" y="1353312"/>
             <a:ext cx="1831086" cy="201168"/>
           </a:xfrm>
           <a:prstGeom prst="rect">
@@ -4627,7 +4613,7 @@
         </p:nvSpPr>
         <p:spPr>
           <a:xfrm>
-            <a:off x="484632" y="1664208"/>
+            <a:off x="484632" y="1554480"/>
             <a:ext cx="1831086" cy="420624"/>
           </a:xfrm>
           <a:prstGeom prst="rect">
@@ -4666,7 +4652,7 @@
         </p:nvSpPr>
         <p:spPr>
           <a:xfrm>
-            <a:off x="2388870" y="1444752"/>
+            <a:off x="2388870" y="1335024"/>
             <a:ext cx="137160" cy="658368"/>
           </a:xfrm>
           <a:prstGeom prst="rect">
@@ -4705,7 +4691,7 @@
         </p:nvSpPr>
         <p:spPr>
           <a:xfrm>
-            <a:off x="2526030" y="1444752"/>
+            <a:off x="2526030" y="1335024"/>
             <a:ext cx="1977390" cy="658368"/>
           </a:xfrm>
           <a:prstGeom prst="rect">
@@ -4730,7 +4716,7 @@
         </p:nvSpPr>
         <p:spPr>
           <a:xfrm>
-            <a:off x="2599182" y="1463040"/>
+            <a:off x="2599182" y="1353312"/>
             <a:ext cx="1831086" cy="201168"/>
           </a:xfrm>
           <a:prstGeom prst="rect">
@@ -4769,7 +4755,7 @@
         </p:nvSpPr>
         <p:spPr>
           <a:xfrm>
-            <a:off x="2599182" y="1664208"/>
+            <a:off x="2599182" y="1554480"/>
             <a:ext cx="1831086" cy="420624"/>
           </a:xfrm>
           <a:prstGeom prst="rect">
@@ -4808,7 +4794,7 @@
         </p:nvSpPr>
         <p:spPr>
           <a:xfrm>
-            <a:off x="4503420" y="1444752"/>
+            <a:off x="4503420" y="1335024"/>
             <a:ext cx="137160" cy="658368"/>
           </a:xfrm>
           <a:prstGeom prst="rect">
@@ -4847,7 +4833,7 @@
         </p:nvSpPr>
         <p:spPr>
           <a:xfrm>
-            <a:off x="4640580" y="1444752"/>
+            <a:off x="4640580" y="1335024"/>
             <a:ext cx="1977390" cy="658368"/>
           </a:xfrm>
           <a:prstGeom prst="rect">
@@ -4872,7 +4858,7 @@
         </p:nvSpPr>
         <p:spPr>
           <a:xfrm>
-            <a:off x="4713732" y="1463040"/>
+            <a:off x="4713732" y="1353312"/>
             <a:ext cx="1831086" cy="201168"/>
           </a:xfrm>
           <a:prstGeom prst="rect">
@@ -4911,7 +4897,7 @@
         </p:nvSpPr>
         <p:spPr>
           <a:xfrm>
-            <a:off x="4713732" y="1664208"/>
+            <a:off x="4713732" y="1554480"/>
             <a:ext cx="1831086" cy="420624"/>
           </a:xfrm>
           <a:prstGeom prst="rect">
@@ -4950,7 +4936,7 @@
         </p:nvSpPr>
         <p:spPr>
           <a:xfrm>
-            <a:off x="6617970" y="1444752"/>
+            <a:off x="6617970" y="1335024"/>
             <a:ext cx="137160" cy="658368"/>
           </a:xfrm>
           <a:prstGeom prst="rect">
@@ -4989,7 +4975,7 @@
         </p:nvSpPr>
         <p:spPr>
           <a:xfrm>
-            <a:off x="6755130" y="1444752"/>
+            <a:off x="6755130" y="1335024"/>
             <a:ext cx="1977390" cy="658368"/>
           </a:xfrm>
           <a:prstGeom prst="rect">
@@ -5014,7 +5000,7 @@
         </p:nvSpPr>
         <p:spPr>
           <a:xfrm>
-            <a:off x="6828282" y="1463040"/>
+            <a:off x="6828282" y="1353312"/>
             <a:ext cx="1831086" cy="201168"/>
           </a:xfrm>
           <a:prstGeom prst="rect">
@@ -5053,7 +5039,7 @@
         </p:nvSpPr>
         <p:spPr>
           <a:xfrm>
-            <a:off x="6828282" y="1664208"/>
+            <a:off x="6828282" y="1554480"/>
             <a:ext cx="1831086" cy="420624"/>
           </a:xfrm>
           <a:prstGeom prst="rect">
@@ -5092,7 +5078,7 @@
         </p:nvSpPr>
         <p:spPr>
           <a:xfrm>
-            <a:off x="411480" y="2212848"/>
+            <a:off x="411480" y="2103120"/>
             <a:ext cx="4846320" cy="237744"/>
           </a:xfrm>
           <a:prstGeom prst="rect">
@@ -5131,7 +5117,7 @@
         </p:nvSpPr>
         <p:spPr>
           <a:xfrm>
-            <a:off x="411480" y="2450592"/>
+            <a:off x="411480" y="2340864"/>
             <a:ext cx="4846320" cy="182880"/>
           </a:xfrm>
           <a:prstGeom prst="rect">
@@ -5169,8 +5155,8 @@
           <p:nvPr/>
         </p:nvGraphicFramePr>
         <p:xfrm>
-          <a:off x="338328" y="2651760"/>
-          <a:ext cx="4937760" cy="1737360"/>
+          <a:off x="338328" y="2542032"/>
+          <a:ext cx="4937760" cy="1847088"/>
         </p:xfrm>
         <a:graphic xmlns:a="http://schemas.openxmlformats.org/drawingml/2006/main">
           <a:graphicData uri="http://schemas.openxmlformats.org/drawingml/2006/chart">
@@ -5186,7 +5172,7 @@
         </p:nvSpPr>
         <p:spPr>
           <a:xfrm>
-            <a:off x="5532120" y="2212848"/>
+            <a:off x="5532120" y="2103120"/>
             <a:ext cx="3200400" cy="219456"/>
           </a:xfrm>
           <a:prstGeom prst="rect">
@@ -5211,7 +5197,7 @@
                 <a:ea typeface="Malgun Gothic" pitchFamily="34" charset="-122"/>
                 <a:cs typeface="Malgun Gothic" pitchFamily="34" charset="-120"/>
               </a:rPr>
-              <a:t>문제 (핵심 기간 2020 → 2022)</a:t>
+              <a:t>핵심 기간 (문제)</a:t>
             </a:r>
             <a:endParaRPr lang="en-US" sz="950" dirty="0"/>
           </a:p>
@@ -5225,8 +5211,8 @@
         </p:nvSpPr>
         <p:spPr>
           <a:xfrm>
-            <a:off x="5532120" y="2450592"/>
-            <a:ext cx="3200400" cy="914400"/>
+            <a:off x="5532120" y="2340864"/>
+            <a:ext cx="3200400" cy="274320"/>
           </a:xfrm>
           <a:prstGeom prst="rect">
             <a:avLst/>
@@ -5239,13 +5225,10 @@
           <a:lstStyle/>
           <a:p>
             <a:pPr indent="0" marL="0">
-              <a:spcAft>
-                <a:spcPts val="300"/>
-              </a:spcAft>
-              <a:buNone/>
-            </a:pPr>
-            <a:r>
-              <a:rPr lang="en-US" sz="900" b="1" dirty="0">
+              <a:buNone/>
+            </a:pPr>
+            <a:r>
+              <a:rPr lang="en-US" sz="1100" b="1" dirty="0">
                 <a:solidFill>
                   <a:srgbClr val="0B0B0B"/>
                 </a:solidFill>
@@ -5255,47 +5238,7 @@
               </a:rPr>
               <a:t>신청 308건(2020) → 72건(2022), 회복 안 됨</a:t>
             </a:r>
-            <a:endParaRPr lang="en-US" sz="900" dirty="0"/>
-          </a:p>
-          <a:p>
-            <a:pPr indent="0" marL="0">
-              <a:spcAft>
-                <a:spcPts val="300"/>
-              </a:spcAft>
-              <a:buNone/>
-            </a:pPr>
-            <a:r>
-              <a:rPr lang="en-US" sz="900" dirty="0">
-                <a:solidFill>
-                  <a:srgbClr val="0B0B0B"/>
-                </a:solidFill>
-                <a:latin typeface="Malgun Gothic" pitchFamily="34" charset="0"/>
-                <a:ea typeface="Malgun Gothic" pitchFamily="34" charset="-122"/>
-                <a:cs typeface="Malgun Gothic" pitchFamily="34" charset="-120"/>
-              </a:rPr>
-              <a:t>손실 연 약 6,000만~1.2억 원 = 연 200건 감소 × 수임 10~20% × 수수료 300만 원</a:t>
-            </a:r>
-            <a:endParaRPr lang="en-US" sz="900" dirty="0"/>
-          </a:p>
-          <a:p>
-            <a:pPr indent="0" marL="0">
-              <a:spcAft>
-                <a:spcPts val="300"/>
-              </a:spcAft>
-              <a:buNone/>
-            </a:pPr>
-            <a:r>
-              <a:rPr lang="en-US" sz="900" dirty="0">
-                <a:solidFill>
-                  <a:srgbClr val="0B0B0B"/>
-                </a:solidFill>
-                <a:latin typeface="Malgun Gothic" pitchFamily="34" charset="0"/>
-                <a:ea typeface="Malgun Gothic" pitchFamily="34" charset="-122"/>
-                <a:cs typeface="Malgun Gothic" pitchFamily="34" charset="-120"/>
-              </a:rPr>
-              <a:t>목표 연 150건 = 방문 3,812(2024) 그대로 두고 신청률만 4.6%로 되돌리면 177건</a:t>
-            </a:r>
-            <a:endParaRPr lang="en-US" sz="900" dirty="0"/>
+            <a:endParaRPr lang="en-US" sz="1100" dirty="0"/>
           </a:p>
         </p:txBody>
       </p:sp>
@@ -5307,7 +5250,7 @@
         </p:nvSpPr>
         <p:spPr>
           <a:xfrm>
-            <a:off x="5532120" y="3383280"/>
+            <a:off x="5532120" y="2743200"/>
             <a:ext cx="3200400" cy="219456"/>
           </a:xfrm>
           <a:prstGeom prst="rect">
@@ -5332,7 +5275,7 @@
                 <a:ea typeface="Malgun Gothic" pitchFamily="34" charset="-122"/>
                 <a:cs typeface="Malgun Gothic" pitchFamily="34" charset="-120"/>
               </a:rPr>
-              <a:t>결과 → 해결책</a:t>
+              <a:t>비즈니스 임팩트</a:t>
             </a:r>
             <a:endParaRPr lang="en-US" sz="950" dirty="0"/>
           </a:p>
@@ -5346,8 +5289,8 @@
         </p:nvSpPr>
         <p:spPr>
           <a:xfrm>
-            <a:off x="5532120" y="3621024"/>
-            <a:ext cx="3200400" cy="777240"/>
+            <a:off x="5532120" y="2980944"/>
+            <a:ext cx="3200400" cy="457200"/>
           </a:xfrm>
           <a:prstGeom prst="rect">
             <a:avLst/>
@@ -5360,13 +5303,10 @@
           <a:lstStyle/>
           <a:p>
             <a:pPr indent="0" marL="0">
-              <a:spcAft>
-                <a:spcPts val="300"/>
-              </a:spcAft>
-              <a:buNone/>
-            </a:pPr>
-            <a:r>
-              <a:rPr lang="en-US" sz="900" dirty="0">
+              <a:buNone/>
+            </a:pPr>
+            <a:r>
+              <a:rPr lang="en-US" sz="950" dirty="0">
                 <a:solidFill>
                   <a:srgbClr val="0B0B0B"/>
                 </a:solidFill>
@@ -5374,35 +5314,93 @@
                 <a:ea typeface="Malgun Gothic" pitchFamily="34" charset="-122"/>
                 <a:cs typeface="Malgun Gothic" pitchFamily="34" charset="-120"/>
               </a:rPr>
-              <a:t>줄어든 236건 = 방문 47% + 신청률 53% (셰이플리 분해)</a:t>
-            </a:r>
-            <a:endParaRPr lang="en-US" sz="900" dirty="0"/>
-          </a:p>
-          <a:p>
-            <a:pPr indent="0" marL="0">
-              <a:spcAft>
-                <a:spcPts val="300"/>
-              </a:spcAft>
-              <a:buNone/>
-            </a:pPr>
-            <a:r>
-              <a:rPr lang="en-US" sz="900" b="1" dirty="0">
-                <a:solidFill>
-                  <a:srgbClr val="2A78D6"/>
-                </a:solidFill>
-                <a:latin typeface="Malgun Gothic" pitchFamily="34" charset="0"/>
-                <a:ea typeface="Malgun Gothic" pitchFamily="34" charset="-122"/>
-                <a:cs typeface="Malgun Gothic" pitchFamily="34" charset="-120"/>
-              </a:rPr>
-              <a:t>랜딩 사이트 개선 · 광고 개선 · 신청마다 수임 여부 기록</a:t>
-            </a:r>
-            <a:endParaRPr lang="en-US" sz="900" dirty="0"/>
-          </a:p>
-        </p:txBody>
-      </p:sp>
-      <p:sp>
-        <p:nvSpPr>
-          <p:cNvPr id="28" name="Shape 25"/>
+              <a:t>손실 연 약 6,000만~1.2억 원 = 연 200건 감소 × 수임 10~20% × 수수료 300만 원</a:t>
+            </a:r>
+            <a:endParaRPr lang="en-US" sz="950" dirty="0"/>
+          </a:p>
+        </p:txBody>
+      </p:sp>
+      <p:sp>
+        <p:nvSpPr>
+          <p:cNvPr id="28" name="Text 25"/>
+          <p:cNvSpPr txBox="1"/>
+          <p:nvPr/>
+        </p:nvSpPr>
+        <p:spPr>
+          <a:xfrm>
+            <a:off x="5532120" y="3511296"/>
+            <a:ext cx="3200400" cy="219456"/>
+          </a:xfrm>
+          <a:prstGeom prst="rect">
+            <a:avLst/>
+          </a:prstGeom>
+          <a:noFill/>
+          <a:ln/>
+        </p:spPr>
+        <p:txBody>
+          <a:bodyPr wrap="square" lIns="0" tIns="0" rIns="0" bIns="0" rtlCol="0" anchor="ctr"/>
+          <a:lstStyle/>
+          <a:p>
+            <a:pPr indent="0" marL="0">
+              <a:buNone/>
+            </a:pPr>
+            <a:r>
+              <a:rPr lang="en-US" sz="950" b="1" dirty="0">
+                <a:solidFill>
+                  <a:srgbClr val="52514E"/>
+                </a:solidFill>
+                <a:latin typeface="Malgun Gothic" pitchFamily="34" charset="0"/>
+                <a:ea typeface="Malgun Gothic" pitchFamily="34" charset="-122"/>
+                <a:cs typeface="Malgun Gothic" pitchFamily="34" charset="-120"/>
+              </a:rPr>
+              <a:t>성공 기준</a:t>
+            </a:r>
+            <a:endParaRPr lang="en-US" sz="950" dirty="0"/>
+          </a:p>
+        </p:txBody>
+      </p:sp>
+      <p:sp>
+        <p:nvSpPr>
+          <p:cNvPr id="29" name="Text 26"/>
+          <p:cNvSpPr txBox="1"/>
+          <p:nvPr/>
+        </p:nvSpPr>
+        <p:spPr>
+          <a:xfrm>
+            <a:off x="5532120" y="3749040"/>
+            <a:ext cx="3200400" cy="457200"/>
+          </a:xfrm>
+          <a:prstGeom prst="rect">
+            <a:avLst/>
+          </a:prstGeom>
+          <a:noFill/>
+          <a:ln/>
+        </p:spPr>
+        <p:txBody>
+          <a:bodyPr wrap="square" lIns="0" tIns="0" rIns="0" bIns="0" rtlCol="0" anchor="t"/>
+          <a:lstStyle/>
+          <a:p>
+            <a:pPr indent="0" marL="0">
+              <a:buNone/>
+            </a:pPr>
+            <a:r>
+              <a:rPr lang="en-US" sz="950" dirty="0">
+                <a:solidFill>
+                  <a:srgbClr val="0B0B0B"/>
+                </a:solidFill>
+                <a:latin typeface="Malgun Gothic" pitchFamily="34" charset="0"/>
+                <a:ea typeface="Malgun Gothic" pitchFamily="34" charset="-122"/>
+                <a:cs typeface="Malgun Gothic" pitchFamily="34" charset="-120"/>
+              </a:rPr>
+              <a:t>목표 연 150건 = 방문 3,812(2024) 그대로 두고 신청률만 4.6%(2020년 수준)로 되돌리면 177건</a:t>
+            </a:r>
+            <a:endParaRPr lang="en-US" sz="950" dirty="0"/>
+          </a:p>
+        </p:txBody>
+      </p:sp>
+      <p:sp>
+        <p:nvSpPr>
+          <p:cNvPr id="30" name="Shape 27"/>
           <p:cNvSpPr/>
           <p:nvPr/>
         </p:nvSpPr>
@@ -5425,7 +5423,7 @@
       </p:sp>
       <p:sp>
         <p:nvSpPr>
-          <p:cNvPr id="29" name="Text 26"/>
+          <p:cNvPr id="31" name="Text 28"/>
           <p:cNvSpPr txBox="1"/>
           <p:nvPr/>
         </p:nvSpPr>
@@ -5456,7 +5454,7 @@
                 <a:ea typeface="Malgun Gothic" pitchFamily="34" charset="-122"/>
                 <a:cs typeface="Malgun Gothic" pitchFamily="34" charset="-120"/>
               </a:rPr>
-              <a:t>출처: 관리자 페이지 문자 전송내역 2014-11 ~ 2026-10-05, 2,895건 → 스팸 254건 제외 2,641건. 수임률·수수료는 변리사 답</a:t>
+              <a:t>출처: 관리자 페이지 문자 전송내역 2014-11 ~ 2026-10-05 · 전처리: 2,895건 → 스팸 254건 제외 2,641건. 수임률·수수료는 변리사 답</a:t>
             </a:r>
             <a:endParaRPr lang="en-US" sz="800" dirty="0"/>
           </a:p>
@@ -5646,7 +5644,7 @@
                 <a:ea typeface="Malgun Gothic" pitchFamily="34" charset="-122"/>
                 <a:cs typeface="Malgun Gothic" pitchFamily="34" charset="-120"/>
               </a:rPr>
-              <a:t>봇을 뺀 실제 방문 추정, 명 · 같은 IP는 하루 1회</a:t>
+              <a:t>봇을 뺀 실제 방문 추정, 명</a:t>
             </a:r>
             <a:endParaRPr lang="en-US" sz="800" dirty="0"/>
           </a:p>
@@ -5704,7 +5702,7 @@
                 <a:ea typeface="Malgun Gothic" pitchFamily="34" charset="-122"/>
                 <a:cs typeface="Malgun Gothic" pitchFamily="34" charset="-120"/>
               </a:rPr>
-              <a:t>봇 추정 = OS "Robot"·"Linux" 방문</a:t>
+              <a:t>전처리: 같은 IP는 하루 1회. 봇 = OS "Robot"·"Linux" 방문을 뺌</a:t>
             </a:r>
             <a:endParaRPr lang="en-US" sz="750" dirty="0"/>
           </a:p>
@@ -5724,7 +5722,7 @@
                 <a:ea typeface="Malgun Gothic" pitchFamily="34" charset="-122"/>
                 <a:cs typeface="Malgun Gothic" pitchFamily="34" charset="-120"/>
               </a:rPr>
-              <a:t>근거: 2021-10부터 방문이 월 900 → 2,100인데 신청은 월 12 → 5. 급증분은 전부 유입 경로 없는 "직접", 시간대 0~23시 고름. 같은 해 Robot 1,059 → 4,508, Linux 2,643 → 7,423</a:t>
+              <a:t>근거: 2021-10부터 방문이 월 900 → 2,100인데 신청은 월 12 → 5. 급증분은 전부 유입 경로 없는 "직접", 시간대 0~23시 고름</a:t>
             </a:r>
             <a:endParaRPr lang="en-US" sz="750" dirty="0"/>
           </a:p>
@@ -5783,7 +5781,7 @@
                 <a:ea typeface="Malgun Gothic" pitchFamily="34" charset="-122"/>
                 <a:cs typeface="Malgun Gothic" pitchFamily="34" charset="-120"/>
               </a:rPr>
-              <a:t>끊긴 것은 다음·블로그·네이버 검색. 광고는 가장 덜 감소 → 원인은 광고가 아님</a:t>
+              <a:t>유입경로별 방문수: 끊긴 것은 다음·블로그·네이버 검색, 광고는 가장 덜 감소</a:t>
             </a:r>
             <a:endParaRPr lang="en-US" sz="1000" dirty="0"/>
           </a:p>
@@ -5902,7 +5900,7 @@
                 <a:ea typeface="Malgun Gothic" pitchFamily="34" charset="-122"/>
                 <a:cs typeface="Malgun Gothic" pitchFamily="34" charset="-120"/>
               </a:rPr>
-              <a:t>2020→22:  네이버 광고 −40% · 네이버 검색 −54% · 네이버 블로그 −93% · 다음 −99% · 신청(문자) −77%</a:t>
+              <a:t>2020→22:  네이버 광고 −40% · 네이버 검색 −54% · 네이버 블로그 −93% · 다음 −99% · 신청 −77%</a:t>
             </a:r>
             <a:endParaRPr lang="en-US" sz="850" dirty="0"/>
           </a:p>
@@ -5966,7 +5964,7 @@
                 <a:ea typeface="Malgun Gothic" pitchFamily="34" charset="-122"/>
                 <a:cs typeface="Malgun Gothic" pitchFamily="34" charset="-120"/>
               </a:rPr>
-              <a:t>GA4로 다시 봄 (2026-09-18 ~ 10-15, 28일, 세션 215)</a:t>
+              <a:t>GA4 유입경로별 세션 (2026-09-18 ~ 10-15, 28일, 215)</a:t>
             </a:r>
             <a:endParaRPr lang="en-US" sz="950" dirty="0"/>
           </a:p>
@@ -6260,7 +6258,7 @@
         </p:nvSpPr>
         <p:spPr>
           <a:xfrm>
-            <a:off x="4864608" y="3840480"/>
+            <a:off x="4864608" y="3858768"/>
             <a:ext cx="3776472" cy="548640"/>
           </a:xfrm>
           <a:prstGeom prst="rect">
@@ -6274,13 +6272,10 @@
           <a:lstStyle/>
           <a:p>
             <a:pPr indent="0" marL="0">
-              <a:spcAft>
-                <a:spcPts val="300"/>
-              </a:spcAft>
-              <a:buNone/>
-            </a:pPr>
-            <a:r>
-              <a:rPr lang="en-US" sz="700" dirty="0">
+              <a:buNone/>
+            </a:pPr>
+            <a:r>
+              <a:rPr lang="en-US" sz="750" dirty="0">
                 <a:solidFill>
                   <a:srgbClr val="0B0B0B"/>
                 </a:solidFill>
@@ -6288,29 +6283,9 @@
                 <a:ea typeface="Malgun Gothic" pitchFamily="34" charset="-122"/>
                 <a:cs typeface="Malgun Gothic" pitchFamily="34" charset="-120"/>
               </a:rPr>
-              <a:t>한계: 10-06 전엔 광고 링크에 UTM이 없어 광고가 Organic Search로 잘못 분류(10-06 수정). Direct 78에는 작업자 접속 섞임</a:t>
-            </a:r>
-            <a:endParaRPr lang="en-US" sz="700" dirty="0"/>
-          </a:p>
-          <a:p>
-            <a:pPr indent="0" marL="0">
-              <a:spcAft>
-                <a:spcPts val="300"/>
-              </a:spcAft>
-              <a:buNone/>
-            </a:pPr>
-            <a:r>
-              <a:rPr lang="en-US" sz="700" dirty="0">
-                <a:solidFill>
-                  <a:srgbClr val="0B0B0B"/>
-                </a:solidFill>
-                <a:latin typeface="Malgun Gothic" pitchFamily="34" charset="0"/>
-                <a:ea typeface="Malgun Gothic" pitchFamily="34" charset="-122"/>
-                <a:cs typeface="Malgun Gothic" pitchFamily="34" charset="-120"/>
-              </a:rPr>
-              <a:t>옛 사이트가 http라 네이버(https)에서 올 때 출처(리퍼러)가 빠져 "직접"으로 잡힘 → 새 사이트는 https로</a:t>
-            </a:r>
-            <a:endParaRPr lang="en-US" sz="700" dirty="0"/>
+              <a:t>한계: 옛 사이트가 http라 네이버(https)에서 올 때 출처(리퍼러 쪽지)가 빠져 "직접"으로 잘못 분류됨. 10-06 전엔 광고 링크에 UTM이 없어 광고가 Organic Search로 들어감</a:t>
+            </a:r>
+            <a:endParaRPr lang="en-US" sz="750" dirty="0"/>
           </a:p>
         </p:txBody>
       </p:sp>
@@ -6370,7 +6345,7 @@
                 <a:ea typeface="Malgun Gothic" pitchFamily="34" charset="-122"/>
                 <a:cs typeface="Malgun Gothic" pitchFamily="34" charset="-120"/>
               </a:rPr>
-              <a:t>출처: 관리자 페이지 접속자통계 — 연도별·OS별 방문자(2015 ~ 2026), 유입 도메인별 방문(2016 ~ 2026-10-06). GA4 트래픽 획득 보고서. 경로 비교는 "직접"(봇 대부분) 제외. 감소율은 2020 → 2022</a:t>
+              <a:t>출처: 관리자 페이지 접속자통계 — 연도별·OS별 방문자(2015 ~ 2026), 유입 도메인별 방문(2016 ~ 2026-10-06). GA4 트래픽 획득 보고서 · 전처리: 경로 비교는 "직접"(봇 대부분) 제외. 감소율은 2020 → 2022</a:t>
             </a:r>
             <a:endParaRPr lang="en-US" sz="800" dirty="0"/>
           </a:p>
@@ -6561,7 +6536,7 @@
         <p:spPr>
           <a:xfrm>
             <a:off x="502920" y="960120"/>
-            <a:ext cx="1920240" cy="1097280"/>
+            <a:ext cx="1920240" cy="822960"/>
           </a:xfrm>
           <a:prstGeom prst="rect">
             <a:avLst/>
@@ -6580,7 +6555,7 @@
               <a:buNone/>
             </a:pPr>
             <a:r>
-              <a:rPr lang="en-US" sz="800" dirty="0">
+              <a:rPr lang="en-US" sz="850" b="1" dirty="0">
                 <a:solidFill>
                   <a:srgbClr val="0B0B0B"/>
                 </a:solidFill>
@@ -6588,9 +6563,9 @@
                 <a:ea typeface="Malgun Gothic" pitchFamily="34" charset="-122"/>
                 <a:cs typeface="Malgun Gothic" pitchFamily="34" charset="-120"/>
               </a:rPr>
-              <a:t>변리사 답: 다음 광고·등록 중단. 그 외 사무소 내부 변화 없음</a:t>
-            </a:r>
-            <a:endParaRPr lang="en-US" sz="800" dirty="0"/>
+              <a:t>다음 광고·등록 중단</a:t>
+            </a:r>
+            <a:endParaRPr lang="en-US" sz="850" dirty="0"/>
           </a:p>
           <a:p>
             <a:pPr indent="0" marL="0">
@@ -6600,7 +6575,7 @@
               <a:buNone/>
             </a:pPr>
             <a:r>
-              <a:rPr lang="en-US" sz="800" dirty="0">
+              <a:rPr lang="en-US" sz="850" dirty="0">
                 <a:solidFill>
                   <a:srgbClr val="0B0B0B"/>
                 </a:solidFill>
@@ -6608,29 +6583,9 @@
                 <a:ea typeface="Malgun Gothic" pitchFamily="34" charset="-122"/>
                 <a:cs typeface="Malgun Gothic" pitchFamily="34" charset="-120"/>
               </a:rPr>
-              <a:t>2015~2020년 연 640~1,620 → 2022년 7</a:t>
-            </a:r>
-            <a:endParaRPr lang="en-US" sz="800" dirty="0"/>
-          </a:p>
-          <a:p>
-            <a:pPr indent="0" marL="0">
-              <a:spcAft>
-                <a:spcPts val="300"/>
-              </a:spcAft>
-              <a:buNone/>
-            </a:pPr>
-            <a:r>
-              <a:rPr lang="en-US" sz="800" dirty="0">
-                <a:solidFill>
-                  <a:srgbClr val="0B0B0B"/>
-                </a:solidFill>
-                <a:latin typeface="Malgun Gothic" pitchFamily="34" charset="0"/>
-                <a:ea typeface="Malgun Gothic" pitchFamily="34" charset="-122"/>
-                <a:cs typeface="Malgun Gothic" pitchFamily="34" charset="-120"/>
-              </a:rPr>
-              <a:t>=&gt; 확인된 원인. 중단 시점이 2021-05이면 신청이 처음 꺾인 달과 일치</a:t>
-            </a:r>
-            <a:endParaRPr lang="en-US" sz="800" dirty="0"/>
+              <a:t>중단 시점이 2021-05이면 신청이 처음 꺾인 달과 일치</a:t>
+            </a:r>
+            <a:endParaRPr lang="en-US" sz="850" dirty="0"/>
           </a:p>
         </p:txBody>
       </p:sp>
@@ -6642,8 +6597,8 @@
         </p:nvSpPr>
         <p:spPr>
           <a:xfrm>
-            <a:off x="502920" y="2103120"/>
-            <a:ext cx="1920240" cy="1572768"/>
+            <a:off x="502920" y="1828800"/>
+            <a:ext cx="1920240" cy="1828800"/>
           </a:xfrm>
           <a:prstGeom prst="rect">
             <a:avLst/>
@@ -6667,8 +6622,8 @@
         </p:nvSpPr>
         <p:spPr>
           <a:xfrm>
-            <a:off x="557784" y="2139696"/>
-            <a:ext cx="1810512" cy="1508760"/>
+            <a:off x="557784" y="1874520"/>
+            <a:ext cx="1810512" cy="1737360"/>
           </a:xfrm>
           <a:prstGeom prst="rect">
             <a:avLst/>
@@ -6695,7 +6650,7 @@
                 <a:ea typeface="Malgun Gothic" pitchFamily="34" charset="-122"/>
                 <a:cs typeface="Malgun Gothic" pitchFamily="34" charset="-120"/>
               </a:rPr>
-              <a:t>재개하면 (예상 비용 vs 추가 매출)</a:t>
+              <a:t>재개하면: 예상 비용 vs 추가 매출</a:t>
             </a:r>
             <a:endParaRPr lang="en-US" sz="750" dirty="0"/>
           </a:p>
@@ -6795,7 +6750,7 @@
                 <a:ea typeface="Malgun Gothic" pitchFamily="34" charset="-122"/>
                 <a:cs typeface="Malgun Gothic" pitchFamily="34" charset="-120"/>
               </a:rPr>
-              <a:t>손익분기 클릭당 14,000~28,000원. 카카오 단가 미확인(네이버의 7배 넘지 않으면 이득)</a:t>
+              <a:t>손익분기 클릭당 14,000~28,000원. 카카오 단가 미확인(네이버의 7배를 넘지 않으면 이득)</a:t>
             </a:r>
             <a:endParaRPr lang="en-US" sz="750" dirty="0"/>
           </a:p>
@@ -6826,7 +6781,7 @@
               <a:buNone/>
             </a:pPr>
             <a:r>
-              <a:rPr lang="en-US" sz="800" b="1" dirty="0">
+              <a:rPr lang="en-US" sz="850" b="1" dirty="0">
                 <a:solidFill>
                   <a:srgbClr val="2A78D6"/>
                 </a:solidFill>
@@ -6834,9 +6789,9 @@
                 <a:ea typeface="Malgun Gothic" pitchFamily="34" charset="-122"/>
                 <a:cs typeface="Malgun Gothic" pitchFamily="34" charset="-120"/>
               </a:rPr>
-              <a:t>=&gt; action item: 다음(카카오) 광고·등록 재개</a:t>
-            </a:r>
-            <a:endParaRPr lang="en-US" sz="800" dirty="0"/>
+              <a:t>=&gt; action item: 다음(카카오) 재개</a:t>
+            </a:r>
+            <a:endParaRPr lang="en-US" sz="850" dirty="0"/>
           </a:p>
         </p:txBody>
       </p:sp>
@@ -6912,7 +6867,7 @@
         </p:nvGraphicFramePr>
         <p:xfrm>
           <a:off x="2560320" y="960120"/>
-          <a:ext cx="2011680" cy="868680"/>
+          <a:ext cx="2011680" cy="914400"/>
         </p:xfrm>
         <a:graphic xmlns:a="http://schemas.openxmlformats.org/drawingml/2006/main">
           <a:graphicData uri="http://schemas.openxmlformats.org/drawingml/2006/chart">
@@ -6928,8 +6883,8 @@
         </p:nvSpPr>
         <p:spPr>
           <a:xfrm>
-            <a:off x="2606040" y="1828800"/>
-            <a:ext cx="1920240" cy="274320"/>
+            <a:off x="2606040" y="1892808"/>
+            <a:ext cx="1920240" cy="292608"/>
           </a:xfrm>
           <a:prstGeom prst="rect">
             <a:avLst/>
@@ -6953,7 +6908,7 @@
                 <a:ea typeface="Malgun Gothic" pitchFamily="34" charset="-122"/>
                 <a:cs typeface="Malgun Gothic" pitchFamily="34" charset="-120"/>
               </a:rPr>
-              <a:t>블로그 글 수(건). 블로그에서 온 방문은 2,555(2016) → 600(2020) → 118(2021) → 43(2022)</a:t>
+              <a:t>블로그 글 수(건, 2014~2025). 블로그에서 온 방문은 2,555(2016) → 600(2020) → 118(2021) → 43(2022)</a:t>
             </a:r>
             <a:endParaRPr lang="en-US" sz="700" dirty="0"/>
           </a:p>
@@ -6967,8 +6922,8 @@
         </p:nvSpPr>
         <p:spPr>
           <a:xfrm>
-            <a:off x="2606040" y="2121408"/>
-            <a:ext cx="1920240" cy="1600200"/>
+            <a:off x="2606040" y="2240280"/>
+            <a:ext cx="1920240" cy="1371600"/>
           </a:xfrm>
           <a:prstGeom prst="rect">
             <a:avLst/>
@@ -6987,7 +6942,7 @@
               <a:buNone/>
             </a:pPr>
             <a:r>
-              <a:rPr lang="en-US" sz="750" dirty="0">
+              <a:rPr lang="en-US" sz="800" dirty="0">
                 <a:solidFill>
                   <a:srgbClr val="0B0B0B"/>
                 </a:solidFill>
@@ -6995,9 +6950,9 @@
                 <a:ea typeface="Malgun Gothic" pitchFamily="34" charset="-122"/>
                 <a:cs typeface="Malgun Gothic" pitchFamily="34" charset="-120"/>
               </a:rPr>
-              <a:t>=&gt; 글의 양은 원인 아님 (가장 많이 쓴 2020~21년에 600 → 118)</a:t>
-            </a:r>
-            <a:endParaRPr lang="en-US" sz="750" dirty="0"/>
+              <a:t>글의 성격: 승소율·FAQ·제도 안내 — 읽을 글 → 등록/승소 리스트 (2015 이후 계속)</a:t>
+            </a:r>
+            <a:endParaRPr lang="en-US" sz="800" dirty="0"/>
           </a:p>
           <a:p>
             <a:pPr indent="0" marL="0">
@@ -7007,7 +6962,7 @@
               <a:buNone/>
             </a:pPr>
             <a:r>
-              <a:rPr lang="en-US" sz="750" dirty="0">
+              <a:rPr lang="en-US" sz="800" dirty="0">
                 <a:solidFill>
                   <a:srgbClr val="0B0B0B"/>
                 </a:solidFill>
@@ -7015,49 +6970,9 @@
                 <a:ea typeface="Malgun Gothic" pitchFamily="34" charset="-122"/>
                 <a:cs typeface="Malgun Gothic" pitchFamily="34" charset="-120"/>
               </a:rPr>
-              <a:t>글의 성격: 2014 승소율·FAQ·제도 안내(읽을 글) → 2015부터 등록/승소 리스트. 최근 50건은 같은 틀의 실적 글</a:t>
-            </a:r>
-            <a:endParaRPr lang="en-US" sz="750" dirty="0"/>
-          </a:p>
-          <a:p>
-            <a:pPr indent="0" marL="0">
-              <a:spcAft>
-                <a:spcPts val="300"/>
-              </a:spcAft>
-              <a:buNone/>
-            </a:pPr>
-            <a:r>
-              <a:rPr lang="en-US" sz="750" dirty="0">
-                <a:solidFill>
-                  <a:srgbClr val="0B0B0B"/>
-                </a:solidFill>
-                <a:latin typeface="Malgun Gothic" pitchFamily="34" charset="0"/>
-                <a:ea typeface="Malgun Gothic" pitchFamily="34" charset="-122"/>
-                <a:cs typeface="Malgun Gothic" pitchFamily="34" charset="-120"/>
-              </a:rPr>
-              <a:t>=&gt; 후보 1: 글 형태 변화. 2016년 정점 뒤 계단식 감소와 일치</a:t>
-            </a:r>
-            <a:endParaRPr lang="en-US" sz="750" dirty="0"/>
-          </a:p>
-          <a:p>
-            <a:pPr indent="0" marL="0">
-              <a:spcAft>
-                <a:spcPts val="300"/>
-              </a:spcAft>
-              <a:buNone/>
-            </a:pPr>
-            <a:r>
-              <a:rPr lang="en-US" sz="750" dirty="0">
-                <a:solidFill>
-                  <a:srgbClr val="0B0B0B"/>
-                </a:solidFill>
-                <a:latin typeface="Malgun Gothic" pitchFamily="34" charset="0"/>
-                <a:ea typeface="Malgun Gothic" pitchFamily="34" charset="-122"/>
-                <a:cs typeface="Malgun Gothic" pitchFamily="34" charset="-120"/>
-              </a:rPr>
-              <a:t>=&gt; 후보 2: 네이버 노출 방식 변화(2016 C-Rank, 2018 VIEW, 2021-10 스마트블록). 둘이 겹친 것으로 봄</a:t>
-            </a:r>
-            <a:endParaRPr lang="en-US" sz="750" dirty="0"/>
+              <a:t>네이버 노출 방식 변화 (2016 C-Rank, 2018 VIEW, 2021-10 스마트블록)</a:t>
+            </a:r>
+            <a:endParaRPr lang="en-US" sz="800" dirty="0"/>
           </a:p>
         </p:txBody>
       </p:sp>
@@ -7086,7 +7001,7 @@
               <a:buNone/>
             </a:pPr>
             <a:r>
-              <a:rPr lang="en-US" sz="800" b="1" dirty="0">
+              <a:rPr lang="en-US" sz="850" b="1" dirty="0">
                 <a:solidFill>
                   <a:srgbClr val="2A78D6"/>
                 </a:solidFill>
@@ -7094,9 +7009,9 @@
                 <a:ea typeface="Malgun Gothic" pitchFamily="34" charset="-122"/>
                 <a:cs typeface="Malgun Gothic" pitchFamily="34" charset="-120"/>
               </a:rPr>
-              <a:t>=&gt; action item: 읽을 내용이 있는 글로. 광고비 없는 경로지만 효과는 몇 년</a:t>
-            </a:r>
-            <a:endParaRPr lang="en-US" sz="800" dirty="0"/>
+              <a:t>=&gt; action item: 읽을 내용이 있는 글로</a:t>
+            </a:r>
+            <a:endParaRPr lang="en-US" sz="850" dirty="0"/>
           </a:p>
         </p:txBody>
       </p:sp>
@@ -7192,7 +7107,7 @@
               <a:buNone/>
             </a:pPr>
             <a:r>
-              <a:rPr lang="en-US" sz="800" dirty="0">
+              <a:rPr lang="en-US" sz="900" b="1" dirty="0">
                 <a:solidFill>
                   <a:srgbClr val="0B0B0B"/>
                 </a:solidFill>
@@ -7200,49 +7115,9 @@
                 <a:ea typeface="Malgun Gothic" pitchFamily="34" charset="-122"/>
                 <a:cs typeface="Malgun Gothic" pitchFamily="34" charset="-120"/>
               </a:rPr>
-              <a:t>광고 아닌 네이버 검색 결과에서 온 방문. 4,902(2016) → 2,220(2020) → 1,028(2022) → 776(2026)</a:t>
-            </a:r>
-            <a:endParaRPr lang="en-US" sz="800" dirty="0"/>
-          </a:p>
-          <a:p>
-            <a:pPr indent="0" marL="0">
-              <a:spcAft>
-                <a:spcPts val="300"/>
-              </a:spcAft>
-              <a:buNone/>
-            </a:pPr>
-            <a:r>
-              <a:rPr lang="en-US" sz="800" dirty="0">
-                <a:solidFill>
-                  <a:srgbClr val="0B0B0B"/>
-                </a:solidFill>
-                <a:latin typeface="Malgun Gothic" pitchFamily="34" charset="0"/>
-                <a:ea typeface="Malgun Gothic" pitchFamily="34" charset="-122"/>
-                <a:cs typeface="Malgun Gothic" pitchFamily="34" charset="-120"/>
-              </a:rPr>
-              <a:t>=&gt; 사이트 쪽 원인으로 추정: 글자가 전부 이미지라 검색엔진이 못 읽음. 과거 검색 순위 자료가 없어 확인은 못 함</a:t>
-            </a:r>
-            <a:endParaRPr lang="en-US" sz="800" dirty="0"/>
-          </a:p>
-          <a:p>
-            <a:pPr indent="0" marL="0">
-              <a:spcAft>
-                <a:spcPts val="300"/>
-              </a:spcAft>
-              <a:buNone/>
-            </a:pPr>
-            <a:r>
-              <a:rPr lang="en-US" sz="800" dirty="0">
-                <a:solidFill>
-                  <a:srgbClr val="52514E"/>
-                </a:solidFill>
-                <a:latin typeface="Malgun Gothic" pitchFamily="34" charset="0"/>
-                <a:ea typeface="Malgun Gothic" pitchFamily="34" charset="-122"/>
-                <a:cs typeface="Malgun Gothic" pitchFamily="34" charset="-120"/>
-              </a:rPr>
-              <a:t>네이버 개편은 블로그 쪽 근거. 사이트 검색까지 바뀌었다는 근거는 없음</a:t>
-            </a:r>
-            <a:endParaRPr lang="en-US" sz="800" dirty="0"/>
+              <a:t>사이트 쪽: 글자가 전부 이미지라 검색엔진이 못 읽음</a:t>
+            </a:r>
+            <a:endParaRPr lang="en-US" sz="900" dirty="0"/>
           </a:p>
         </p:txBody>
       </p:sp>
@@ -7271,7 +7146,7 @@
               <a:buNone/>
             </a:pPr>
             <a:r>
-              <a:rPr lang="en-US" sz="800" b="1" dirty="0">
+              <a:rPr lang="en-US" sz="850" b="1" dirty="0">
                 <a:solidFill>
                   <a:srgbClr val="2A78D6"/>
                 </a:solidFill>
@@ -7279,9 +7154,9 @@
                 <a:ea typeface="Malgun Gothic" pitchFamily="34" charset="-122"/>
                 <a:cs typeface="Malgun Gothic" pitchFamily="34" charset="-120"/>
               </a:rPr>
-              <a:t>=&gt; action item: 리뉴얼로 글자를 텍스트로. 그 뒤 유입이 늘면 사이트 쪽 원인이었던 것</a:t>
-            </a:r>
-            <a:endParaRPr lang="en-US" sz="800" dirty="0"/>
+              <a:t>=&gt; action item: 리뉴얼로 글자를 텍스트로</a:t>
+            </a:r>
+            <a:endParaRPr lang="en-US" sz="850" dirty="0"/>
           </a:p>
         </p:txBody>
       </p:sp>
@@ -7377,7 +7252,7 @@
               <a:buNone/>
             </a:pPr>
             <a:r>
-              <a:rPr lang="en-US" sz="800" b="1" dirty="0">
+              <a:rPr lang="en-US" sz="900" dirty="0">
                 <a:solidFill>
                   <a:srgbClr val="0B0B0B"/>
                 </a:solidFill>
@@ -7385,9 +7260,9 @@
                 <a:ea typeface="Malgun Gothic" pitchFamily="34" charset="-122"/>
                 <a:cs typeface="Malgun Gothic" pitchFamily="34" charset="-120"/>
               </a:rPr>
-              <a:t>가장 덜 줄어 원인 아님</a:t>
-            </a:r>
-            <a:endParaRPr lang="en-US" sz="800" dirty="0"/>
+              <a:t>옛 사이트 세션(1개월) 약 180, 그중 광고 주소로 온 방문 120 (GA4)</a:t>
+            </a:r>
+            <a:endParaRPr lang="en-US" sz="900" dirty="0"/>
           </a:p>
           <a:p>
             <a:pPr indent="0" marL="0">
@@ -7397,7 +7272,7 @@
               <a:buNone/>
             </a:pPr>
             <a:r>
-              <a:rPr lang="en-US" sz="800" dirty="0">
+              <a:rPr lang="en-US" sz="900" dirty="0">
                 <a:solidFill>
                   <a:srgbClr val="0B0B0B"/>
                 </a:solidFill>
@@ -7405,94 +7280,15 @@
                 <a:ea typeface="Malgun Gothic" pitchFamily="34" charset="-122"/>
                 <a:cs typeface="Malgun Gothic" pitchFamily="34" charset="-120"/>
               </a:rPr>
-              <a:t>GA4 2026-09: 옛 사이트 세션(1개월) 약 180, 그중 광고 주소로 온 방문 120 → 실제 방문의 3분의 2가 광고</a:t>
-            </a:r>
-            <a:endParaRPr lang="en-US" sz="800" dirty="0"/>
-          </a:p>
-          <a:p>
-            <a:pPr indent="0" marL="0">
-              <a:spcAft>
-                <a:spcPts val="300"/>
-              </a:spcAft>
-              <a:buNone/>
-            </a:pPr>
-            <a:r>
-              <a:rPr lang="en-US" sz="800" dirty="0">
-                <a:solidFill>
-                  <a:srgbClr val="0B0B0B"/>
-                </a:solidFill>
-                <a:latin typeface="Malgun Gothic" pitchFamily="34" charset="0"/>
-                <a:ea typeface="Malgun Gothic" pitchFamily="34" charset="-122"/>
-                <a:cs typeface="Malgun Gothic" pitchFamily="34" charset="-120"/>
-              </a:rPr>
-              <a:t>기기: 신청 페이지 142명 중 모바일 62(44%). 사이트는 PC 폭 고정</a:t>
-            </a:r>
-            <a:endParaRPr lang="en-US" sz="800" dirty="0"/>
-          </a:p>
-          <a:p>
-            <a:pPr indent="0" marL="0">
-              <a:spcAft>
-                <a:spcPts val="300"/>
-              </a:spcAft>
-              <a:buNone/>
-            </a:pPr>
-            <a:r>
-              <a:rPr lang="en-US" sz="800" dirty="0">
-                <a:solidFill>
-                  <a:srgbClr val="0B0B0B"/>
-                </a:solidFill>
-                <a:latin typeface="Malgun Gothic" pitchFamily="34" charset="0"/>
-                <a:ea typeface="Malgun Gothic" pitchFamily="34" charset="-122"/>
-                <a:cs typeface="Malgun Gothic" pitchFamily="34" charset="-120"/>
-              </a:rPr>
-              <a:t>광고그룹 24개 중 21개는 첫 화면 → 출원 페이지로 자동 이동. 그 사이 광고 검색어가 사라지고 조회수가 두 번 셈</a:t>
-            </a:r>
-            <a:endParaRPr lang="en-US" sz="800" dirty="0"/>
-          </a:p>
-        </p:txBody>
-      </p:sp>
-      <p:sp>
-        <p:nvSpPr>
-          <p:cNvPr id="22" name="Text 19"/>
-          <p:cNvSpPr txBox="1"/>
-          <p:nvPr/>
-        </p:nvSpPr>
-        <p:spPr>
-          <a:xfrm>
-            <a:off x="6812280" y="3749040"/>
-            <a:ext cx="1920240" cy="640080"/>
-          </a:xfrm>
-          <a:prstGeom prst="rect">
-            <a:avLst/>
-          </a:prstGeom>
-          <a:noFill/>
-          <a:ln/>
-        </p:spPr>
-        <p:txBody>
-          <a:bodyPr wrap="square" lIns="0" tIns="0" rIns="0" bIns="0" rtlCol="0" anchor="t"/>
-          <a:lstStyle/>
-          <a:p>
-            <a:pPr indent="0" marL="0">
-              <a:buNone/>
-            </a:pPr>
-            <a:r>
-              <a:rPr lang="en-US" sz="800" b="1" dirty="0">
-                <a:solidFill>
-                  <a:srgbClr val="2A78D6"/>
-                </a:solidFill>
-                <a:latin typeface="Malgun Gothic" pitchFamily="34" charset="0"/>
-                <a:ea typeface="Malgun Gothic" pitchFamily="34" charset="-122"/>
-                <a:cs typeface="Malgun Gothic" pitchFamily="34" charset="-120"/>
-              </a:rPr>
-              <a:t>=&gt; action item: 랜딩은 광고 방문자 기준, 휴대폰부터. 광고가 바로 해당 페이지로 → 다음 장</a:t>
-            </a:r>
-            <a:endParaRPr lang="en-US" sz="800" dirty="0"/>
-          </a:p>
-        </p:txBody>
-      </p:sp>
-      <p:sp>
-        <p:nvSpPr>
-          <p:cNvPr id="23" name="Shape 20"/>
+              <a:t>기기: 신청 페이지 142명 중 모바일 62 (44%)</a:t>
+            </a:r>
+            <a:endParaRPr lang="en-US" sz="900" dirty="0"/>
+          </a:p>
+        </p:txBody>
+      </p:sp>
+      <p:sp>
+        <p:nvSpPr>
+          <p:cNvPr id="22" name="Shape 19"/>
           <p:cNvSpPr/>
           <p:nvPr/>
         </p:nvSpPr>
@@ -7515,7 +7311,7 @@
       </p:sp>
       <p:sp>
         <p:nvSpPr>
-          <p:cNvPr id="24" name="Text 21"/>
+          <p:cNvPr id="23" name="Text 20"/>
           <p:cNvSpPr txBox="1"/>
           <p:nvPr/>
         </p:nvSpPr>
@@ -7546,7 +7342,7 @@
                 <a:ea typeface="Malgun Gothic" pitchFamily="34" charset="-122"/>
                 <a:cs typeface="Malgun Gothic" pitchFamily="34" charset="-120"/>
               </a:rPr>
-              <a:t>출처: 접속자통계 유입 도메인별 방문, 사무소 네이버 블로그 글 2,736건(공개 목록), GA4 2026-09-02 ~ 10-01(작업자 접속 69세션 제외). 변리사 답은 기억에 의한 값</a:t>
+              <a:t>출처: 접속자통계 유입 도메인별 방문, 사무소 네이버 블로그 글 목록 2,736건(공개 RSS·글 목록), GA4 2026-09-02 ~ 10-01 · 전처리: GA4는 작업자 접속이 섞인 "직접" 69세션 제외. 다음 중단은 변리사 답</a:t>
             </a:r>
             <a:endParaRPr lang="en-US" sz="800" dirty="0"/>
           </a:p>
@@ -7666,28 +7462,42 @@
       </p:sp>
       <p:sp>
         <p:nvSpPr>
-          <p:cNvPr id="3" name="Shape 1"/>
-          <p:cNvSpPr/>
-          <p:nvPr/>
-        </p:nvSpPr>
-        <p:spPr>
-          <a:xfrm>
-            <a:off x="411480" y="676656"/>
-            <a:ext cx="2682240" cy="457200"/>
-          </a:xfrm>
-          <a:prstGeom prst="rect">
-            <a:avLst/>
-          </a:prstGeom>
-          <a:solidFill>
-            <a:srgbClr val="EEF4FB"/>
-          </a:solidFill>
-          <a:ln w="12700">
-            <a:solidFill>
-              <a:srgbClr val="EEF4FB"/>
-            </a:solidFill>
-            <a:prstDash val="solid"/>
-          </a:ln>
-        </p:spPr>
+          <p:cNvPr id="3" name="Text 1"/>
+          <p:cNvSpPr txBox="1"/>
+          <p:nvPr/>
+        </p:nvSpPr>
+        <p:spPr>
+          <a:xfrm>
+            <a:off x="411480" y="658368"/>
+            <a:ext cx="4937760" cy="237744"/>
+          </a:xfrm>
+          <a:prstGeom prst="rect">
+            <a:avLst/>
+          </a:prstGeom>
+          <a:noFill/>
+          <a:ln/>
+        </p:spPr>
+        <p:txBody>
+          <a:bodyPr wrap="square" lIns="0" tIns="0" rIns="0" bIns="0" rtlCol="0" anchor="ctr"/>
+          <a:lstStyle/>
+          <a:p>
+            <a:pPr indent="0" marL="0">
+              <a:buNone/>
+            </a:pPr>
+            <a:r>
+              <a:rPr lang="en-US" sz="1100" b="1" dirty="0">
+                <a:solidFill>
+                  <a:srgbClr val="0B0B0B"/>
+                </a:solidFill>
+                <a:latin typeface="Malgun Gothic" pitchFamily="34" charset="0"/>
+                <a:ea typeface="Malgun Gothic" pitchFamily="34" charset="-122"/>
+                <a:cs typeface="Malgun Gothic" pitchFamily="34" charset="-120"/>
+              </a:rPr>
+              <a:t>검색어 유형별 클릭률</a:t>
+            </a:r>
+            <a:endParaRPr lang="en-US" sz="1100" dirty="0"/>
+          </a:p>
+        </p:txBody>
       </p:sp>
       <p:sp>
         <p:nvSpPr>
@@ -7697,8 +7507,8 @@
         </p:nvSpPr>
         <p:spPr>
           <a:xfrm>
-            <a:off x="502920" y="694944"/>
-            <a:ext cx="2499360" cy="219456"/>
+            <a:off x="411480" y="896112"/>
+            <a:ext cx="4937760" cy="182880"/>
           </a:xfrm>
           <a:prstGeom prst="rect">
             <a:avLst/>
@@ -7714,46 +7524,7 @@
               <a:buNone/>
             </a:pPr>
             <a:r>
-              <a:rPr lang="en-US" sz="1000" b="1" dirty="0">
-                <a:solidFill>
-                  <a:srgbClr val="0B0B0B"/>
-                </a:solidFill>
-                <a:latin typeface="Malgun Gothic" pitchFamily="34" charset="0"/>
-                <a:ea typeface="Malgun Gothic" pitchFamily="34" charset="-122"/>
-                <a:cs typeface="Malgun Gothic" pitchFamily="34" charset="-120"/>
-              </a:rPr>
-              <a:t>실제 방문의 3분의 2가 광고</a:t>
-            </a:r>
-            <a:endParaRPr lang="en-US" sz="1000" dirty="0"/>
-          </a:p>
-        </p:txBody>
-      </p:sp>
-      <p:sp>
-        <p:nvSpPr>
-          <p:cNvPr id="5" name="Text 3"/>
-          <p:cNvSpPr txBox="1"/>
-          <p:nvPr/>
-        </p:nvSpPr>
-        <p:spPr>
-          <a:xfrm>
-            <a:off x="502920" y="914400"/>
-            <a:ext cx="2499360" cy="182880"/>
-          </a:xfrm>
-          <a:prstGeom prst="rect">
-            <a:avLst/>
-          </a:prstGeom>
-          <a:noFill/>
-          <a:ln/>
-        </p:spPr>
-        <p:txBody>
-          <a:bodyPr wrap="square" lIns="0" tIns="0" rIns="0" bIns="0" rtlCol="0" anchor="ctr"/>
-          <a:lstStyle/>
-          <a:p>
-            <a:pPr indent="0" marL="0">
-              <a:buNone/>
-            </a:pPr>
-            <a:r>
-              <a:rPr lang="en-US" sz="750" dirty="0">
+              <a:rPr lang="en-US" sz="800" dirty="0">
                 <a:solidFill>
                   <a:srgbClr val="52514E"/>
                 </a:solidFill>
@@ -7761,291 +7532,7 @@
                 <a:ea typeface="Malgun Gothic" pitchFamily="34" charset="-122"/>
                 <a:cs typeface="Malgun Gothic" pitchFamily="34" charset="-120"/>
               </a:rPr>
-              <a:t>9월 세션 약 180 중 광고 주소로 온 120 (GA4)</a:t>
-            </a:r>
-            <a:endParaRPr lang="en-US" sz="750" dirty="0"/>
-          </a:p>
-        </p:txBody>
-      </p:sp>
-      <p:sp>
-        <p:nvSpPr>
-          <p:cNvPr id="6" name="Shape 4"/>
-          <p:cNvSpPr/>
-          <p:nvPr/>
-        </p:nvSpPr>
-        <p:spPr>
-          <a:xfrm>
-            <a:off x="3230880" y="676656"/>
-            <a:ext cx="2682240" cy="457200"/>
-          </a:xfrm>
-          <a:prstGeom prst="rect">
-            <a:avLst/>
-          </a:prstGeom>
-          <a:solidFill>
-            <a:srgbClr val="EEF4FB"/>
-          </a:solidFill>
-          <a:ln w="12700">
-            <a:solidFill>
-              <a:srgbClr val="EEF4FB"/>
-            </a:solidFill>
-            <a:prstDash val="solid"/>
-          </a:ln>
-        </p:spPr>
-      </p:sp>
-      <p:sp>
-        <p:nvSpPr>
-          <p:cNvPr id="7" name="Text 5"/>
-          <p:cNvSpPr txBox="1"/>
-          <p:nvPr/>
-        </p:nvSpPr>
-        <p:spPr>
-          <a:xfrm>
-            <a:off x="3322320" y="694944"/>
-            <a:ext cx="2499360" cy="219456"/>
-          </a:xfrm>
-          <a:prstGeom prst="rect">
-            <a:avLst/>
-          </a:prstGeom>
-          <a:noFill/>
-          <a:ln/>
-        </p:spPr>
-        <p:txBody>
-          <a:bodyPr wrap="square" lIns="0" tIns="0" rIns="0" bIns="0" rtlCol="0" anchor="ctr"/>
-          <a:lstStyle/>
-          <a:p>
-            <a:pPr indent="0" marL="0">
-              <a:buNone/>
-            </a:pPr>
-            <a:r>
-              <a:rPr lang="en-US" sz="1000" b="1" dirty="0">
-                <a:solidFill>
-                  <a:srgbClr val="0B0B0B"/>
-                </a:solidFill>
-                <a:latin typeface="Malgun Gothic" pitchFamily="34" charset="0"/>
-                <a:ea typeface="Malgun Gothic" pitchFamily="34" charset="-122"/>
-                <a:cs typeface="Malgun Gothic" pitchFamily="34" charset="-120"/>
-              </a:rPr>
-              <a:t>모바일 44%</a:t>
-            </a:r>
-            <a:endParaRPr lang="en-US" sz="1000" dirty="0"/>
-          </a:p>
-        </p:txBody>
-      </p:sp>
-      <p:sp>
-        <p:nvSpPr>
-          <p:cNvPr id="8" name="Text 6"/>
-          <p:cNvSpPr txBox="1"/>
-          <p:nvPr/>
-        </p:nvSpPr>
-        <p:spPr>
-          <a:xfrm>
-            <a:off x="3322320" y="914400"/>
-            <a:ext cx="2499360" cy="182880"/>
-          </a:xfrm>
-          <a:prstGeom prst="rect">
-            <a:avLst/>
-          </a:prstGeom>
-          <a:noFill/>
-          <a:ln/>
-        </p:spPr>
-        <p:txBody>
-          <a:bodyPr wrap="square" lIns="0" tIns="0" rIns="0" bIns="0" rtlCol="0" anchor="ctr"/>
-          <a:lstStyle/>
-          <a:p>
-            <a:pPr indent="0" marL="0">
-              <a:buNone/>
-            </a:pPr>
-            <a:r>
-              <a:rPr lang="en-US" sz="750" dirty="0">
-                <a:solidFill>
-                  <a:srgbClr val="52514E"/>
-                </a:solidFill>
-                <a:latin typeface="Malgun Gothic" pitchFamily="34" charset="0"/>
-                <a:ea typeface="Malgun Gothic" pitchFamily="34" charset="-122"/>
-                <a:cs typeface="Malgun Gothic" pitchFamily="34" charset="-120"/>
-              </a:rPr>
-              <a:t>신청 페이지 142명 중 62. 옛 사이트는 PC 폭 고정</a:t>
-            </a:r>
-            <a:endParaRPr lang="en-US" sz="750" dirty="0"/>
-          </a:p>
-        </p:txBody>
-      </p:sp>
-      <p:sp>
-        <p:nvSpPr>
-          <p:cNvPr id="9" name="Shape 7"/>
-          <p:cNvSpPr/>
-          <p:nvPr/>
-        </p:nvSpPr>
-        <p:spPr>
-          <a:xfrm>
-            <a:off x="6050280" y="676656"/>
-            <a:ext cx="2682240" cy="457200"/>
-          </a:xfrm>
-          <a:prstGeom prst="rect">
-            <a:avLst/>
-          </a:prstGeom>
-          <a:solidFill>
-            <a:srgbClr val="EEF4FB"/>
-          </a:solidFill>
-          <a:ln w="12700">
-            <a:solidFill>
-              <a:srgbClr val="EEF4FB"/>
-            </a:solidFill>
-            <a:prstDash val="solid"/>
-          </a:ln>
-        </p:spPr>
-      </p:sp>
-      <p:sp>
-        <p:nvSpPr>
-          <p:cNvPr id="10" name="Text 8"/>
-          <p:cNvSpPr txBox="1"/>
-          <p:nvPr/>
-        </p:nvSpPr>
-        <p:spPr>
-          <a:xfrm>
-            <a:off x="6141720" y="694944"/>
-            <a:ext cx="2499360" cy="219456"/>
-          </a:xfrm>
-          <a:prstGeom prst="rect">
-            <a:avLst/>
-          </a:prstGeom>
-          <a:noFill/>
-          <a:ln/>
-        </p:spPr>
-        <p:txBody>
-          <a:bodyPr wrap="square" lIns="0" tIns="0" rIns="0" bIns="0" rtlCol="0" anchor="ctr"/>
-          <a:lstStyle/>
-          <a:p>
-            <a:pPr indent="0" marL="0">
-              <a:buNone/>
-            </a:pPr>
-            <a:r>
-              <a:rPr lang="en-US" sz="1000" b="1" dirty="0">
-                <a:solidFill>
-                  <a:srgbClr val="0B0B0B"/>
-                </a:solidFill>
-                <a:latin typeface="Malgun Gothic" pitchFamily="34" charset="0"/>
-                <a:ea typeface="Malgun Gothic" pitchFamily="34" charset="-122"/>
-                <a:cs typeface="Malgun Gothic" pitchFamily="34" charset="-120"/>
-              </a:rPr>
-              <a:t>90일 노출 195,455 · 클릭 388 · 733,728원</a:t>
-            </a:r>
-            <a:endParaRPr lang="en-US" sz="1000" dirty="0"/>
-          </a:p>
-        </p:txBody>
-      </p:sp>
-      <p:sp>
-        <p:nvSpPr>
-          <p:cNvPr id="11" name="Text 9"/>
-          <p:cNvSpPr txBox="1"/>
-          <p:nvPr/>
-        </p:nvSpPr>
-        <p:spPr>
-          <a:xfrm>
-            <a:off x="6141720" y="914400"/>
-            <a:ext cx="2499360" cy="182880"/>
-          </a:xfrm>
-          <a:prstGeom prst="rect">
-            <a:avLst/>
-          </a:prstGeom>
-          <a:noFill/>
-          <a:ln/>
-        </p:spPr>
-        <p:txBody>
-          <a:bodyPr wrap="square" lIns="0" tIns="0" rIns="0" bIns="0" rtlCol="0" anchor="ctr"/>
-          <a:lstStyle/>
-          <a:p>
-            <a:pPr indent="0" marL="0">
-              <a:buNone/>
-            </a:pPr>
-            <a:r>
-              <a:rPr lang="en-US" sz="750" dirty="0">
-                <a:solidFill>
-                  <a:srgbClr val="52514E"/>
-                </a:solidFill>
-                <a:latin typeface="Malgun Gothic" pitchFamily="34" charset="0"/>
-                <a:ea typeface="Malgun Gothic" pitchFamily="34" charset="-122"/>
-                <a:cs typeface="Malgun Gothic" pitchFamily="34" charset="-120"/>
-              </a:rPr>
-              <a:t>클릭률 0.2% · 클릭당 1,891원 · 전환 측정 없음</a:t>
-            </a:r>
-            <a:endParaRPr lang="en-US" sz="750" dirty="0"/>
-          </a:p>
-        </p:txBody>
-      </p:sp>
-      <p:sp>
-        <p:nvSpPr>
-          <p:cNvPr id="12" name="Text 10"/>
-          <p:cNvSpPr txBox="1"/>
-          <p:nvPr/>
-        </p:nvSpPr>
-        <p:spPr>
-          <a:xfrm>
-            <a:off x="411480" y="1243584"/>
-            <a:ext cx="4937760" cy="237744"/>
-          </a:xfrm>
-          <a:prstGeom prst="rect">
-            <a:avLst/>
-          </a:prstGeom>
-          <a:noFill/>
-          <a:ln/>
-        </p:spPr>
-        <p:txBody>
-          <a:bodyPr wrap="square" lIns="0" tIns="0" rIns="0" bIns="0" rtlCol="0" anchor="ctr"/>
-          <a:lstStyle/>
-          <a:p>
-            <a:pPr indent="0" marL="0">
-              <a:buNone/>
-            </a:pPr>
-            <a:r>
-              <a:rPr lang="en-US" sz="1050" b="1" dirty="0">
-                <a:solidFill>
-                  <a:srgbClr val="0B0B0B"/>
-                </a:solidFill>
-                <a:latin typeface="Malgun Gothic" pitchFamily="34" charset="0"/>
-                <a:ea typeface="Malgun Gothic" pitchFamily="34" charset="-122"/>
-                <a:cs typeface="Malgun Gothic" pitchFamily="34" charset="-120"/>
-              </a:rPr>
-              <a:t>특허·변리사 같은 일반 검색어는 1만 번 보여야 12번 눌린다</a:t>
-            </a:r>
-            <a:endParaRPr lang="en-US" sz="1050" dirty="0"/>
-          </a:p>
-        </p:txBody>
-      </p:sp>
-      <p:sp>
-        <p:nvSpPr>
-          <p:cNvPr id="13" name="Text 11"/>
-          <p:cNvSpPr txBox="1"/>
-          <p:nvPr/>
-        </p:nvSpPr>
-        <p:spPr>
-          <a:xfrm>
-            <a:off x="411480" y="1481328"/>
-            <a:ext cx="4937760" cy="182880"/>
-          </a:xfrm>
-          <a:prstGeom prst="rect">
-            <a:avLst/>
-          </a:prstGeom>
-          <a:noFill/>
-          <a:ln/>
-        </p:spPr>
-        <p:txBody>
-          <a:bodyPr wrap="square" lIns="0" tIns="0" rIns="0" bIns="0" rtlCol="0" anchor="ctr"/>
-          <a:lstStyle/>
-          <a:p>
-            <a:pPr indent="0" marL="0">
-              <a:buNone/>
-            </a:pPr>
-            <a:r>
-              <a:rPr lang="en-US" sz="800" dirty="0">
-                <a:solidFill>
-                  <a:srgbClr val="52514E"/>
-                </a:solidFill>
-                <a:latin typeface="Malgun Gothic" pitchFamily="34" charset="0"/>
-                <a:ea typeface="Malgun Gothic" pitchFamily="34" charset="-122"/>
-                <a:cs typeface="Malgun Gothic" pitchFamily="34" charset="-120"/>
-              </a:rPr>
-              <a:t>검색어 유형별 클릭률 · 괄호는 90일 클릭 수 · 클릭당 비용은 유형과 상관없이 2,000원 안팎(지역명만 706원)</a:t>
+              <a:t>괄호는 90일 클릭 수 · 클릭당 비용은 유형과 상관없이 2,000원 안팎 (지역명만 706원)</a:t>
             </a:r>
             <a:endParaRPr lang="en-US" sz="800" dirty="0"/>
           </a:p>
@@ -8053,13 +7540,13 @@
       </p:sp>
       <p:graphicFrame>
         <p:nvGraphicFramePr>
-          <p:cNvPr id="14" name="Chart 0" descr=""/>
+          <p:cNvPr id="5" name="Chart 0" descr=""/>
           <p:cNvGraphicFramePr/>
           <p:nvPr/>
         </p:nvGraphicFramePr>
         <p:xfrm>
-          <a:off x="320040" y="1700784"/>
-          <a:ext cx="4754880" cy="2697480"/>
+          <a:off x="320040" y="1115568"/>
+          <a:ext cx="4754880" cy="3246120"/>
         </p:xfrm>
         <a:graphic xmlns:a="http://schemas.openxmlformats.org/drawingml/2006/main">
           <a:graphicData uri="http://schemas.openxmlformats.org/drawingml/2006/chart">
@@ -8069,14 +7556,14 @@
       </p:graphicFrame>
       <p:sp>
         <p:nvSpPr>
-          <p:cNvPr id="15" name="Text 12"/>
+          <p:cNvPr id="6" name="Text 3"/>
           <p:cNvSpPr txBox="1"/>
           <p:nvPr/>
         </p:nvSpPr>
         <p:spPr>
           <a:xfrm>
-            <a:off x="5440680" y="1243584"/>
-            <a:ext cx="3291840" cy="219456"/>
+            <a:off x="5440680" y="658368"/>
+            <a:ext cx="3291840" cy="237744"/>
           </a:xfrm>
           <a:prstGeom prst="rect">
             <a:avLst/>
@@ -8092,30 +7579,30 @@
               <a:buNone/>
             </a:pPr>
             <a:r>
-              <a:rPr lang="en-US" sz="950" b="1" dirty="0">
-                <a:solidFill>
-                  <a:srgbClr val="52514E"/>
-                </a:solidFill>
-                <a:latin typeface="Malgun Gothic" pitchFamily="34" charset="0"/>
-                <a:ea typeface="Malgun Gothic" pitchFamily="34" charset="-122"/>
-                <a:cs typeface="Malgun Gothic" pitchFamily="34" charset="-120"/>
-              </a:rPr>
-              <a:t>포괄 검색어 8개 vs 구체적 검색어 (모든 광고그룹)</a:t>
-            </a:r>
-            <a:endParaRPr lang="en-US" sz="950" dirty="0"/>
-          </a:p>
-        </p:txBody>
-      </p:sp>
-      <p:sp>
-        <p:nvSpPr>
-          <p:cNvPr id="16" name="Text 13"/>
+              <a:rPr lang="en-US" sz="1100" b="1" dirty="0">
+                <a:solidFill>
+                  <a:srgbClr val="0B0B0B"/>
+                </a:solidFill>
+                <a:latin typeface="Malgun Gothic" pitchFamily="34" charset="0"/>
+                <a:ea typeface="Malgun Gothic" pitchFamily="34" charset="-122"/>
+                <a:cs typeface="Malgun Gothic" pitchFamily="34" charset="-120"/>
+              </a:rPr>
+              <a:t>작년 정리로 광고비 −45%에 신청은 −17%</a:t>
+            </a:r>
+            <a:endParaRPr lang="en-US" sz="1100" dirty="0"/>
+          </a:p>
+        </p:txBody>
+      </p:sp>
+      <p:sp>
+        <p:nvSpPr>
+          <p:cNvPr id="7" name="Text 4"/>
           <p:cNvSpPr txBox="1"/>
           <p:nvPr/>
         </p:nvSpPr>
         <p:spPr>
           <a:xfrm>
-            <a:off x="5440680" y="1463040"/>
-            <a:ext cx="3291840" cy="384048"/>
+            <a:off x="5440680" y="896112"/>
+            <a:ext cx="3291840" cy="182880"/>
           </a:xfrm>
           <a:prstGeom prst="rect">
             <a:avLst/>
@@ -8131,21 +7618,7 @@
               <a:buNone/>
             </a:pPr>
             <a:r>
-              <a:rPr lang="en-US" sz="2200" b="1" dirty="0">
-                <a:solidFill>
-                  <a:srgbClr val="EB6834"/>
-                </a:solidFill>
-                <a:latin typeface="Malgun Gothic" pitchFamily="34" charset="0"/>
-                <a:ea typeface="Malgun Gothic" pitchFamily="34" charset="-122"/>
-                <a:cs typeface="Malgun Gothic" pitchFamily="34" charset="-120"/>
-              </a:rPr>
-              <a:t>0.06%</a:t>
-            </a:r>
-            <a:pPr indent="0" marL="0">
-              <a:buNone/>
-            </a:pPr>
-            <a:r>
-              <a:rPr lang="en-US" sz="1000" dirty="0">
+              <a:rPr lang="en-US" sz="800" dirty="0">
                 <a:solidFill>
                   <a:srgbClr val="52514E"/>
                 </a:solidFill>
@@ -8153,161 +7626,7 @@
                 <a:ea typeface="Malgun Gothic" pitchFamily="34" charset="-122"/>
                 <a:cs typeface="Malgun Gothic" pitchFamily="34" charset="-120"/>
               </a:rPr>
-              <a:t>  vs  </a:t>
-            </a:r>
-            <a:pPr indent="0" marL="0">
-              <a:buNone/>
-            </a:pPr>
-            <a:r>
-              <a:rPr lang="en-US" sz="2200" b="1" dirty="0">
-                <a:solidFill>
-                  <a:srgbClr val="2A78D6"/>
-                </a:solidFill>
-                <a:latin typeface="Malgun Gothic" pitchFamily="34" charset="0"/>
-                <a:ea typeface="Malgun Gothic" pitchFamily="34" charset="-122"/>
-                <a:cs typeface="Malgun Gothic" pitchFamily="34" charset="-120"/>
-              </a:rPr>
-              <a:t>0.50%</a:t>
-            </a:r>
-            <a:endParaRPr lang="en-US" sz="2200" dirty="0"/>
-          </a:p>
-        </p:txBody>
-      </p:sp>
-      <p:sp>
-        <p:nvSpPr>
-          <p:cNvPr id="17" name="Text 14"/>
-          <p:cNvSpPr txBox="1"/>
-          <p:nvPr/>
-        </p:nvSpPr>
-        <p:spPr>
-          <a:xfrm>
-            <a:off x="5440680" y="1847088"/>
-            <a:ext cx="3291840" cy="566928"/>
-          </a:xfrm>
-          <a:prstGeom prst="rect">
-            <a:avLst/>
-          </a:prstGeom>
-          <a:noFill/>
-          <a:ln/>
-        </p:spPr>
-        <p:txBody>
-          <a:bodyPr wrap="square" lIns="0" tIns="0" rIns="0" bIns="0" rtlCol="0" anchor="t"/>
-          <a:lstStyle/>
-          <a:p>
-            <a:pPr indent="0" marL="0">
-              <a:spcAft>
-                <a:spcPts val="300"/>
-              </a:spcAft>
-              <a:buNone/>
-            </a:pPr>
-            <a:r>
-              <a:rPr lang="en-US" sz="800" dirty="0">
-                <a:solidFill>
-                  <a:srgbClr val="0B0B0B"/>
-                </a:solidFill>
-                <a:latin typeface="Malgun Gothic" pitchFamily="34" charset="0"/>
-                <a:ea typeface="Malgun Gothic" pitchFamily="34" charset="-122"/>
-                <a:cs typeface="Malgun Gothic" pitchFamily="34" charset="-120"/>
-              </a:rPr>
-              <a:t>포괄 검색어가 노출 68%, 광고비 26%를 쓰고 클릭은 20%. 클릭당 비용은 같음(2,547원 대 2,434원). 피셔, 우연일 확률 0.1% 미만</a:t>
-            </a:r>
-            <a:endParaRPr lang="en-US" sz="800" dirty="0"/>
-          </a:p>
-          <a:p>
-            <a:pPr indent="0" marL="0">
-              <a:spcAft>
-                <a:spcPts val="300"/>
-              </a:spcAft>
-              <a:buNone/>
-            </a:pPr>
-            <a:r>
-              <a:rPr lang="en-US" sz="800" dirty="0">
-                <a:solidFill>
-                  <a:srgbClr val="0B0B0B"/>
-                </a:solidFill>
-                <a:latin typeface="Malgun Gothic" pitchFamily="34" charset="0"/>
-                <a:ea typeface="Malgun Gothic" pitchFamily="34" charset="-122"/>
-                <a:cs typeface="Malgun Gothic" pitchFamily="34" charset="-120"/>
-              </a:rPr>
-              <a:t>확장 검색은 직접 등록한 키워드의 절반만 눌림(0.32% 대 0.61%)</a:t>
-            </a:r>
-            <a:endParaRPr lang="en-US" sz="800" dirty="0"/>
-          </a:p>
-        </p:txBody>
-      </p:sp>
-      <p:sp>
-        <p:nvSpPr>
-          <p:cNvPr id="18" name="Text 15"/>
-          <p:cNvSpPr txBox="1"/>
-          <p:nvPr/>
-        </p:nvSpPr>
-        <p:spPr>
-          <a:xfrm>
-            <a:off x="5440680" y="2432304"/>
-            <a:ext cx="3291840" cy="237744"/>
-          </a:xfrm>
-          <a:prstGeom prst="rect">
-            <a:avLst/>
-          </a:prstGeom>
-          <a:noFill/>
-          <a:ln/>
-        </p:spPr>
-        <p:txBody>
-          <a:bodyPr wrap="square" lIns="0" tIns="0" rIns="0" bIns="0" rtlCol="0" anchor="ctr"/>
-          <a:lstStyle/>
-          <a:p>
-            <a:pPr indent="0" marL="0">
-              <a:buNone/>
-            </a:pPr>
-            <a:r>
-              <a:rPr lang="en-US" sz="950" b="1" dirty="0">
-                <a:solidFill>
-                  <a:srgbClr val="0B0B0B"/>
-                </a:solidFill>
-                <a:latin typeface="Malgun Gothic" pitchFamily="34" charset="0"/>
-                <a:ea typeface="Malgun Gothic" pitchFamily="34" charset="-122"/>
-                <a:cs typeface="Malgun Gothic" pitchFamily="34" charset="-120"/>
-              </a:rPr>
-              <a:t>작년 정리로 광고비 −45%에 신청은 −17%</a:t>
-            </a:r>
-            <a:endParaRPr lang="en-US" sz="950" dirty="0"/>
-          </a:p>
-        </p:txBody>
-      </p:sp>
-      <p:sp>
-        <p:nvSpPr>
-          <p:cNvPr id="19" name="Text 16"/>
-          <p:cNvSpPr txBox="1"/>
-          <p:nvPr/>
-        </p:nvSpPr>
-        <p:spPr>
-          <a:xfrm>
-            <a:off x="5440680" y="2670048"/>
-            <a:ext cx="3291840" cy="182880"/>
-          </a:xfrm>
-          <a:prstGeom prst="rect">
-            <a:avLst/>
-          </a:prstGeom>
-          <a:noFill/>
-          <a:ln/>
-        </p:spPr>
-        <p:txBody>
-          <a:bodyPr wrap="square" lIns="0" tIns="0" rIns="0" bIns="0" rtlCol="0" anchor="ctr"/>
-          <a:lstStyle/>
-          <a:p>
-            <a:pPr indent="0" marL="0">
-              <a:buNone/>
-            </a:pPr>
-            <a:r>
-              <a:rPr lang="en-US" sz="800" dirty="0">
-                <a:solidFill>
-                  <a:srgbClr val="52514E"/>
-                </a:solidFill>
-                <a:latin typeface="Malgun Gothic" pitchFamily="34" charset="0"/>
-                <a:ea typeface="Malgun Gothic" pitchFamily="34" charset="-122"/>
-                <a:cs typeface="Malgun Gothic" pitchFamily="34" charset="-120"/>
-              </a:rPr>
-              <a:t>작년 정리 전후, 같은 90일. 2025년을 100으로. 18→15는 우연일 확률 73%(이항), 광고비대로 줄었다면 15건 이상일 확률 8%(포아송)</a:t>
+              <a:t>작년 정리 전후, 같은 90일. 2025년을 100으로</a:t>
             </a:r>
             <a:endParaRPr lang="en-US" sz="800" dirty="0"/>
           </a:p>
@@ -8315,13 +7634,13 @@
       </p:sp>
       <p:graphicFrame>
         <p:nvGraphicFramePr>
-          <p:cNvPr id="20" name="Chart 1" descr=""/>
+          <p:cNvPr id="8" name="Chart 1" descr=""/>
           <p:cNvGraphicFramePr/>
           <p:nvPr/>
         </p:nvGraphicFramePr>
         <p:xfrm>
-          <a:off x="5394960" y="2834640"/>
-          <a:ext cx="3383280" cy="932688"/>
+          <a:off x="5394960" y="1188720"/>
+          <a:ext cx="3383280" cy="2103120"/>
         </p:xfrm>
         <a:graphic xmlns:a="http://schemas.openxmlformats.org/drawingml/2006/main">
           <a:graphicData uri="http://schemas.openxmlformats.org/drawingml/2006/chart">
@@ -8331,94 +7650,7 @@
       </p:graphicFrame>
       <p:sp>
         <p:nvSpPr>
-          <p:cNvPr id="21" name="Shape 17"/>
-          <p:cNvSpPr/>
-          <p:nvPr/>
-        </p:nvSpPr>
-        <p:spPr>
-          <a:xfrm>
-            <a:off x="5440680" y="3822192"/>
-            <a:ext cx="3291840" cy="603504"/>
-          </a:xfrm>
-          <a:prstGeom prst="rect">
-            <a:avLst/>
-          </a:prstGeom>
-          <a:solidFill>
-            <a:srgbClr val="EEF4FB"/>
-          </a:solidFill>
-          <a:ln w="12700">
-            <a:solidFill>
-              <a:srgbClr val="EEF4FB"/>
-            </a:solidFill>
-            <a:prstDash val="solid"/>
-          </a:ln>
-        </p:spPr>
-      </p:sp>
-      <p:sp>
-        <p:nvSpPr>
-          <p:cNvPr id="22" name="Text 18"/>
-          <p:cNvSpPr txBox="1"/>
-          <p:nvPr/>
-        </p:nvSpPr>
-        <p:spPr>
-          <a:xfrm>
-            <a:off x="5532120" y="3858768"/>
-            <a:ext cx="3108960" cy="548640"/>
-          </a:xfrm>
-          <a:prstGeom prst="rect">
-            <a:avLst/>
-          </a:prstGeom>
-          <a:noFill/>
-          <a:ln/>
-        </p:spPr>
-        <p:txBody>
-          <a:bodyPr wrap="square" lIns="0" tIns="0" rIns="0" bIns="0" rtlCol="0" anchor="t"/>
-          <a:lstStyle/>
-          <a:p>
-            <a:pPr indent="0" marL="0">
-              <a:spcAft>
-                <a:spcPts val="300"/>
-              </a:spcAft>
-              <a:buNone/>
-            </a:pPr>
-            <a:r>
-              <a:rPr lang="en-US" sz="750" dirty="0">
-                <a:solidFill>
-                  <a:srgbClr val="0B0B0B"/>
-                </a:solidFill>
-                <a:latin typeface="Malgun Gothic" pitchFamily="34" charset="0"/>
-                <a:ea typeface="Malgun Gothic" pitchFamily="34" charset="-122"/>
-                <a:cs typeface="Malgun Gothic" pitchFamily="34" charset="-120"/>
-              </a:rPr>
-              <a:t>뺌: 특허·특허법인·변리사·특허사무소 입찰 낮추거나 제외("특허출원"은 남김). 확장 검색은 성적 나쁜 그룹부터 끔, "변리사파견" 등 무관 노출 정리</a:t>
-            </a:r>
-            <a:endParaRPr lang="en-US" sz="750" dirty="0"/>
-          </a:p>
-          <a:p>
-            <a:pPr indent="0" marL="0">
-              <a:spcAft>
-                <a:spcPts val="300"/>
-              </a:spcAft>
-              <a:buNone/>
-            </a:pPr>
-            <a:r>
-              <a:rPr lang="en-US" sz="750" dirty="0">
-                <a:solidFill>
-                  <a:srgbClr val="0B0B0B"/>
-                </a:solidFill>
-                <a:latin typeface="Malgun Gothic" pitchFamily="34" charset="0"/>
-                <a:ea typeface="Malgun Gothic" pitchFamily="34" charset="-122"/>
-                <a:cs typeface="Malgun Gothic" pitchFamily="34" charset="-120"/>
-              </a:rPr>
-              <a:t>늘림: 지방 키워드(클릭률 1.9%, 클릭당 706원, 변리사 선호), 심사관출신 그룹(클릭률 1위, 비용 2.5%)</a:t>
-            </a:r>
-            <a:endParaRPr lang="en-US" sz="750" dirty="0"/>
-          </a:p>
-        </p:txBody>
-      </p:sp>
-      <p:sp>
-        <p:nvSpPr>
-          <p:cNvPr id="23" name="Shape 19"/>
+          <p:cNvPr id="9" name="Shape 5"/>
           <p:cNvSpPr/>
           <p:nvPr/>
         </p:nvSpPr>
@@ -8441,7 +7673,7 @@
       </p:sp>
       <p:sp>
         <p:nvSpPr>
-          <p:cNvPr id="24" name="Text 20"/>
+          <p:cNvPr id="10" name="Text 6"/>
           <p:cNvSpPr txBox="1"/>
           <p:nvPr/>
         </p:nvSpPr>
@@ -8472,24 +7704,7 @@
                 <a:ea typeface="Malgun Gothic" pitchFamily="34" charset="-122"/>
                 <a:cs typeface="Malgun Gothic" pitchFamily="34" charset="-120"/>
               </a:rPr>
-              <a:t>출처: 네이버 검색광고 검색어 보고서 2026-07-06 ~ 10-03(90일, 27,277행), 비교용 2025-07-02 ~ 09-29. GA4 2026-09-02 ~ 10-01(작업자 접속 69세션 제외)</a:t>
-            </a:r>
-            <a:endParaRPr lang="en-US" sz="800" dirty="0"/>
-          </a:p>
-          <a:p>
-            <a:pPr indent="0" marL="0">
-              <a:buNone/>
-            </a:pPr>
-            <a:r>
-              <a:rPr lang="en-US" sz="800" dirty="0">
-                <a:solidFill>
-                  <a:srgbClr val="52514E"/>
-                </a:solidFill>
-                <a:latin typeface="Malgun Gothic" pitchFamily="34" charset="0"/>
-                <a:ea typeface="Malgun Gothic" pitchFamily="34" charset="-122"/>
-                <a:cs typeface="Malgun Gothic" pitchFamily="34" charset="-120"/>
-              </a:rPr>
-              <a:t>검색어 9,383개를 글자 규칙으로 유형 분류(클릭 난 231개는 검산). 한계: 전환 측정이 없어 클릭까지만 봄. 확장 검색의 실제 검색어는 보고서에 안 나옴</a:t>
+              <a:t>출처: 네이버 검색광고 검색어 보고서 2026-07-06 ~ 10-03(90일), 비교용 2025-07-02 ~ 09-29 · 전처리: 27,277행, 보고서 제목 줄 제거. 검색어 9,383개를 글자 규칙으로 유형 분류(클릭 난 231개는 검산)</a:t>
             </a:r>
             <a:endParaRPr lang="en-US" sz="800" dirty="0"/>
           </a:p>
@@ -8616,7 +7831,7 @@
         <p:spPr>
           <a:xfrm>
             <a:off x="4069080" y="658368"/>
-            <a:ext cx="0" cy="2926080"/>
+            <a:ext cx="0" cy="3017520"/>
           </a:xfrm>
           <a:prstGeom prst="line">
             <a:avLst/>
@@ -8639,7 +7854,7 @@
         <p:spPr>
           <a:xfrm>
             <a:off x="6583680" y="658368"/>
-            <a:ext cx="0" cy="2926080"/>
+            <a:ext cx="0" cy="3017520"/>
           </a:xfrm>
           <a:prstGeom prst="line">
             <a:avLst/>
@@ -8731,7 +7946,7 @@
               <a:buNone/>
             </a:pPr>
             <a:r>
-              <a:rPr lang="en-US" sz="850" dirty="0">
+              <a:rPr lang="en-US" sz="900" dirty="0">
                 <a:solidFill>
                   <a:srgbClr val="52514E"/>
                 </a:solidFill>
@@ -8739,7 +7954,7 @@
                 <a:ea typeface="Malgun Gothic" pitchFamily="34" charset="-122"/>
                 <a:cs typeface="Malgun Gothic" pitchFamily="34" charset="-120"/>
               </a:rPr>
-              <a:t>  2020 → 2022, 절반. 방문도 절반 → 신청 4분의 1</a:t>
+              <a:t>  2020 → 2022</a:t>
             </a:r>
             <a:endParaRPr lang="en-US" sz="1800" dirty="0"/>
           </a:p>
@@ -8817,7 +8032,7 @@
                 <a:ea typeface="Malgun Gothic" pitchFamily="34" charset="-122"/>
                 <a:cs typeface="Malgun Gothic" pitchFamily="34" charset="-120"/>
               </a:rPr>
-              <a:t>GA4 광고 유입 120건의 검색어 유형별 체류(%) · 괄호는 사람 수, 수가 작아 경향</a:t>
+              <a:t>GA4 광고 유입 120건의 검색어 유형별 체류(%) · 괄호는 사람 수</a:t>
             </a:r>
             <a:endParaRPr lang="en-US" sz="800" dirty="0"/>
           </a:p>
@@ -8831,7 +8046,7 @@
         </p:nvGraphicFramePr>
         <p:xfrm>
           <a:off x="338328" y="1664208"/>
-          <a:ext cx="3675888" cy="1325880"/>
+          <a:ext cx="3675888" cy="1463040"/>
         </p:xfrm>
         <a:graphic xmlns:a="http://schemas.openxmlformats.org/drawingml/2006/main">
           <a:graphicData uri="http://schemas.openxmlformats.org/drawingml/2006/chart">
@@ -8847,8 +8062,139 @@
         </p:nvSpPr>
         <p:spPr>
           <a:xfrm>
-            <a:off x="411480" y="3008376"/>
-            <a:ext cx="3566160" cy="228600"/>
+            <a:off x="411480" y="3255264"/>
+            <a:ext cx="3566160" cy="365760"/>
+          </a:xfrm>
+          <a:prstGeom prst="rect">
+            <a:avLst/>
+          </a:prstGeom>
+          <a:noFill/>
+          <a:ln/>
+        </p:spPr>
+        <p:txBody>
+          <a:bodyPr wrap="square" lIns="0" tIns="0" rIns="0" bIns="0" rtlCol="0" anchor="t"/>
+          <a:lstStyle/>
+          <a:p>
+            <a:pPr indent="0" marL="0">
+              <a:buNone/>
+            </a:pPr>
+            <a:r>
+              <a:rPr lang="en-US" sz="900" b="1" dirty="0">
+                <a:solidFill>
+                  <a:srgbClr val="2A78D6"/>
+                </a:solidFill>
+                <a:latin typeface="Malgun Gothic" pitchFamily="34" charset="0"/>
+                <a:ea typeface="Malgun Gothic" pitchFamily="34" charset="-122"/>
+                <a:cs typeface="Malgun Gothic" pitchFamily="34" charset="-120"/>
+              </a:rPr>
+              <a:t>=&gt; action item: 18초 안에 "누가·무엇을·무료로", 읽기 끝에 간편 신청</a:t>
+            </a:r>
+            <a:endParaRPr lang="en-US" sz="900" dirty="0"/>
+          </a:p>
+        </p:txBody>
+      </p:sp>
+      <p:sp>
+        <p:nvSpPr>
+          <p:cNvPr id="11" name="Text 8"/>
+          <p:cNvSpPr txBox="1"/>
+          <p:nvPr/>
+        </p:nvSpPr>
+        <p:spPr>
+          <a:xfrm>
+            <a:off x="4160520" y="658368"/>
+            <a:ext cx="2331720" cy="219456"/>
+          </a:xfrm>
+          <a:prstGeom prst="rect">
+            <a:avLst/>
+          </a:prstGeom>
+          <a:noFill/>
+          <a:ln/>
+        </p:spPr>
+        <p:txBody>
+          <a:bodyPr wrap="square" lIns="0" tIns="0" rIns="0" bIns="0" rtlCol="0" anchor="ctr"/>
+          <a:lstStyle/>
+          <a:p>
+            <a:pPr indent="0" marL="0">
+              <a:buNone/>
+            </a:pPr>
+            <a:r>
+              <a:rPr lang="en-US" sz="950" b="1" dirty="0">
+                <a:solidFill>
+                  <a:srgbClr val="52514E"/>
+                </a:solidFill>
+                <a:latin typeface="Malgun Gothic" pitchFamily="34" charset="0"/>
+                <a:ea typeface="Malgun Gothic" pitchFamily="34" charset="-122"/>
+                <a:cs typeface="Malgun Gothic" pitchFamily="34" charset="-120"/>
+              </a:rPr>
+              <a:t>수임 전환율</a:t>
+            </a:r>
+            <a:endParaRPr lang="en-US" sz="950" dirty="0"/>
+          </a:p>
+        </p:txBody>
+      </p:sp>
+      <p:sp>
+        <p:nvSpPr>
+          <p:cNvPr id="12" name="Text 9"/>
+          <p:cNvSpPr txBox="1"/>
+          <p:nvPr/>
+        </p:nvSpPr>
+        <p:spPr>
+          <a:xfrm>
+            <a:off x="4160520" y="877824"/>
+            <a:ext cx="2331720" cy="347472"/>
+          </a:xfrm>
+          <a:prstGeom prst="rect">
+            <a:avLst/>
+          </a:prstGeom>
+          <a:noFill/>
+          <a:ln/>
+        </p:spPr>
+        <p:txBody>
+          <a:bodyPr wrap="square" lIns="0" tIns="0" rIns="0" bIns="0" rtlCol="0" anchor="ctr"/>
+          <a:lstStyle/>
+          <a:p>
+            <a:pPr indent="0" marL="0">
+              <a:buNone/>
+            </a:pPr>
+            <a:r>
+              <a:rPr lang="en-US" sz="1800" b="1" dirty="0">
+                <a:solidFill>
+                  <a:srgbClr val="EB6834"/>
+                </a:solidFill>
+                <a:latin typeface="Malgun Gothic" pitchFamily="34" charset="0"/>
+                <a:ea typeface="Malgun Gothic" pitchFamily="34" charset="-122"/>
+                <a:cs typeface="Malgun Gothic" pitchFamily="34" charset="-120"/>
+              </a:rPr>
+              <a:t>기록 없음</a:t>
+            </a:r>
+            <a:pPr indent="0" marL="0">
+              <a:buNone/>
+            </a:pPr>
+            <a:r>
+              <a:rPr lang="en-US" sz="900" dirty="0">
+                <a:solidFill>
+                  <a:srgbClr val="52514E"/>
+                </a:solidFill>
+                <a:latin typeface="Malgun Gothic" pitchFamily="34" charset="0"/>
+                <a:ea typeface="Malgun Gothic" pitchFamily="34" charset="-122"/>
+                <a:cs typeface="Malgun Gothic" pitchFamily="34" charset="-120"/>
+              </a:rPr>
+              <a:t>  신청 뒤는 전화</a:t>
+            </a:r>
+            <a:endParaRPr lang="en-US" sz="1800" dirty="0"/>
+          </a:p>
+        </p:txBody>
+      </p:sp>
+      <p:sp>
+        <p:nvSpPr>
+          <p:cNvPr id="13" name="Text 10"/>
+          <p:cNvSpPr txBox="1"/>
+          <p:nvPr/>
+        </p:nvSpPr>
+        <p:spPr>
+          <a:xfrm>
+            <a:off x="4160520" y="1298448"/>
+            <a:ext cx="2331720" cy="1920240"/>
           </a:xfrm>
           <a:prstGeom prst="rect">
             <a:avLst/>
@@ -8867,7 +8213,7 @@
               <a:buNone/>
             </a:pPr>
             <a:r>
-              <a:rPr lang="en-US" sz="750" dirty="0">
+              <a:rPr lang="en-US" sz="900" b="1" dirty="0">
                 <a:solidFill>
                   <a:srgbClr val="0B0B0B"/>
                 </a:solidFill>
@@ -8875,600 +8221,10 @@
                 <a:ea typeface="Malgun Gothic" pitchFamily="34" charset="-122"/>
                 <a:cs typeface="Malgun Gothic" pitchFamily="34" charset="-120"/>
               </a:rPr>
-              <a:t>Clarity 녹화 5건: 4건은 20~34초 읽기만 하고 폼·전화번호 접촉 0</a:t>
-            </a:r>
-            <a:endParaRPr lang="en-US" sz="750" dirty="0"/>
-          </a:p>
-        </p:txBody>
-      </p:sp>
-      <p:sp>
-        <p:nvSpPr>
-          <p:cNvPr id="11" name="Text 8"/>
-          <p:cNvSpPr txBox="1"/>
-          <p:nvPr/>
-        </p:nvSpPr>
-        <p:spPr>
-          <a:xfrm>
-            <a:off x="411480" y="3255264"/>
-            <a:ext cx="3566160" cy="329184"/>
-          </a:xfrm>
-          <a:prstGeom prst="rect">
-            <a:avLst/>
-          </a:prstGeom>
-          <a:noFill/>
-          <a:ln/>
-        </p:spPr>
-        <p:txBody>
-          <a:bodyPr wrap="square" lIns="0" tIns="0" rIns="0" bIns="0" rtlCol="0" anchor="t"/>
-          <a:lstStyle/>
-          <a:p>
-            <a:pPr indent="0" marL="0">
-              <a:buNone/>
-            </a:pPr>
-            <a:r>
-              <a:rPr lang="en-US" sz="850" b="1" dirty="0">
-                <a:solidFill>
-                  <a:srgbClr val="2A78D6"/>
-                </a:solidFill>
-                <a:latin typeface="Malgun Gothic" pitchFamily="34" charset="0"/>
-                <a:ea typeface="Malgun Gothic" pitchFamily="34" charset="-122"/>
-                <a:cs typeface="Malgun Gothic" pitchFamily="34" charset="-120"/>
-              </a:rPr>
-              <a:t>=&gt; action item: 18초 안에 "누가·무엇을·무료로", 읽기 끝에 간편 신청, 휴대폰 대응</a:t>
-            </a:r>
-            <a:endParaRPr lang="en-US" sz="850" dirty="0"/>
-          </a:p>
-        </p:txBody>
-      </p:sp>
-      <p:sp>
-        <p:nvSpPr>
-          <p:cNvPr id="12" name="Text 9"/>
-          <p:cNvSpPr txBox="1"/>
-          <p:nvPr/>
-        </p:nvSpPr>
-        <p:spPr>
-          <a:xfrm>
-            <a:off x="4160520" y="658368"/>
-            <a:ext cx="2331720" cy="219456"/>
-          </a:xfrm>
-          <a:prstGeom prst="rect">
-            <a:avLst/>
-          </a:prstGeom>
-          <a:noFill/>
-          <a:ln/>
-        </p:spPr>
-        <p:txBody>
-          <a:bodyPr wrap="square" lIns="0" tIns="0" rIns="0" bIns="0" rtlCol="0" anchor="ctr"/>
-          <a:lstStyle/>
-          <a:p>
-            <a:pPr indent="0" marL="0">
-              <a:buNone/>
-            </a:pPr>
-            <a:r>
-              <a:rPr lang="en-US" sz="950" b="1" dirty="0">
-                <a:solidFill>
-                  <a:srgbClr val="52514E"/>
-                </a:solidFill>
-                <a:latin typeface="Malgun Gothic" pitchFamily="34" charset="0"/>
-                <a:ea typeface="Malgun Gothic" pitchFamily="34" charset="-122"/>
-                <a:cs typeface="Malgun Gothic" pitchFamily="34" charset="-120"/>
-              </a:rPr>
-              <a:t>수임 전환율</a:t>
-            </a:r>
-            <a:endParaRPr lang="en-US" sz="950" dirty="0"/>
-          </a:p>
-        </p:txBody>
-      </p:sp>
-      <p:sp>
-        <p:nvSpPr>
-          <p:cNvPr id="13" name="Text 10"/>
-          <p:cNvSpPr txBox="1"/>
-          <p:nvPr/>
-        </p:nvSpPr>
-        <p:spPr>
-          <a:xfrm>
-            <a:off x="4160520" y="877824"/>
-            <a:ext cx="2331720" cy="347472"/>
-          </a:xfrm>
-          <a:prstGeom prst="rect">
-            <a:avLst/>
-          </a:prstGeom>
-          <a:noFill/>
-          <a:ln/>
-        </p:spPr>
-        <p:txBody>
-          <a:bodyPr wrap="square" lIns="0" tIns="0" rIns="0" bIns="0" rtlCol="0" anchor="ctr"/>
-          <a:lstStyle/>
-          <a:p>
-            <a:pPr indent="0" marL="0">
-              <a:buNone/>
-            </a:pPr>
-            <a:r>
-              <a:rPr lang="en-US" sz="1800" b="1" dirty="0">
-                <a:solidFill>
-                  <a:srgbClr val="EB6834"/>
-                </a:solidFill>
-                <a:latin typeface="Malgun Gothic" pitchFamily="34" charset="0"/>
-                <a:ea typeface="Malgun Gothic" pitchFamily="34" charset="-122"/>
-                <a:cs typeface="Malgun Gothic" pitchFamily="34" charset="-120"/>
-              </a:rPr>
-              <a:t>기록 없음</a:t>
-            </a:r>
-            <a:pPr indent="0" marL="0">
-              <a:buNone/>
-            </a:pPr>
-            <a:r>
-              <a:rPr lang="en-US" sz="850" dirty="0">
-                <a:solidFill>
-                  <a:srgbClr val="52514E"/>
-                </a:solidFill>
-                <a:latin typeface="Malgun Gothic" pitchFamily="34" charset="0"/>
-                <a:ea typeface="Malgun Gothic" pitchFamily="34" charset="-122"/>
-                <a:cs typeface="Malgun Gothic" pitchFamily="34" charset="-120"/>
-              </a:rPr>
-              <a:t>  신청 뒤는 전화</a:t>
-            </a:r>
-            <a:endParaRPr lang="en-US" sz="1800" dirty="0"/>
-          </a:p>
-        </p:txBody>
-      </p:sp>
-      <p:sp>
-        <p:nvSpPr>
-          <p:cNvPr id="14" name="Shape 11"/>
-          <p:cNvSpPr/>
-          <p:nvPr/>
-        </p:nvSpPr>
-        <p:spPr>
-          <a:xfrm>
-            <a:off x="4160520" y="1280160"/>
-            <a:ext cx="1417320" cy="274320"/>
-          </a:xfrm>
-          <a:prstGeom prst="roundRect">
-            <a:avLst>
-              <a:gd name="adj" fmla="val 16667"/>
-            </a:avLst>
-          </a:prstGeom>
-          <a:solidFill>
-            <a:srgbClr val="2A78D6"/>
-          </a:solidFill>
-          <a:ln w="12700">
-            <a:solidFill>
-              <a:srgbClr val="2A78D6"/>
-            </a:solidFill>
-            <a:prstDash val="solid"/>
-          </a:ln>
-        </p:spPr>
-      </p:sp>
-      <p:sp>
-        <p:nvSpPr>
-          <p:cNvPr id="15" name="Text 12"/>
-          <p:cNvSpPr txBox="1"/>
-          <p:nvPr/>
-        </p:nvSpPr>
-        <p:spPr>
-          <a:xfrm>
-            <a:off x="4233672" y="1280160"/>
-            <a:ext cx="1325880" cy="274320"/>
-          </a:xfrm>
-          <a:prstGeom prst="rect">
-            <a:avLst/>
-          </a:prstGeom>
-          <a:noFill/>
-          <a:ln/>
-        </p:spPr>
-        <p:txBody>
-          <a:bodyPr wrap="square" lIns="0" tIns="0" rIns="0" bIns="0" rtlCol="0" anchor="ctr"/>
-          <a:lstStyle/>
-          <a:p>
-            <a:pPr indent="0" marL="0">
-              <a:buNone/>
-            </a:pPr>
-            <a:r>
-              <a:rPr lang="en-US" sz="750" dirty="0">
-                <a:solidFill>
-                  <a:srgbClr val="FFFFFF"/>
-                </a:solidFill>
-                <a:latin typeface="Malgun Gothic" pitchFamily="34" charset="0"/>
-                <a:ea typeface="Malgun Gothic" pitchFamily="34" charset="-122"/>
-                <a:cs typeface="Malgun Gothic" pitchFamily="34" charset="-120"/>
-              </a:rPr>
-              <a:t>노출  </a:t>
-            </a:r>
-            <a:pPr indent="0" marL="0">
-              <a:buNone/>
-            </a:pPr>
-            <a:r>
-              <a:rPr lang="en-US" sz="1050" b="1" dirty="0">
-                <a:solidFill>
-                  <a:srgbClr val="FFFFFF"/>
-                </a:solidFill>
-                <a:latin typeface="Malgun Gothic" pitchFamily="34" charset="0"/>
-                <a:ea typeface="Malgun Gothic" pitchFamily="34" charset="-122"/>
-                <a:cs typeface="Malgun Gothic" pitchFamily="34" charset="-120"/>
-              </a:rPr>
-              <a:t>195,455</a:t>
-            </a:r>
-            <a:endParaRPr lang="en-US" sz="750" dirty="0"/>
-          </a:p>
-        </p:txBody>
-      </p:sp>
-      <p:sp>
-        <p:nvSpPr>
-          <p:cNvPr id="16" name="Text 13"/>
-          <p:cNvSpPr txBox="1"/>
-          <p:nvPr/>
-        </p:nvSpPr>
-        <p:spPr>
-          <a:xfrm>
-            <a:off x="5641848" y="1435608"/>
-            <a:ext cx="822960" cy="182880"/>
-          </a:xfrm>
-          <a:prstGeom prst="rect">
-            <a:avLst/>
-          </a:prstGeom>
-          <a:noFill/>
-          <a:ln/>
-        </p:spPr>
-        <p:txBody>
-          <a:bodyPr wrap="square" lIns="0" tIns="0" rIns="0" bIns="0" rtlCol="0" anchor="t"/>
-          <a:lstStyle/>
-          <a:p>
-            <a:pPr indent="0" marL="0">
-              <a:buNone/>
-            </a:pPr>
-            <a:r>
-              <a:rPr lang="en-US" sz="750" b="1" dirty="0">
-                <a:solidFill>
-                  <a:srgbClr val="52514E"/>
-                </a:solidFill>
-                <a:latin typeface="Malgun Gothic" pitchFamily="34" charset="0"/>
-                <a:ea typeface="Malgun Gothic" pitchFamily="34" charset="-122"/>
-                <a:cs typeface="Malgun Gothic" pitchFamily="34" charset="-120"/>
-              </a:rPr>
-              <a:t>↓ 0.2%</a:t>
-            </a:r>
-            <a:endParaRPr lang="en-US" sz="750" dirty="0"/>
-          </a:p>
-        </p:txBody>
-      </p:sp>
-      <p:sp>
-        <p:nvSpPr>
-          <p:cNvPr id="17" name="Shape 14"/>
-          <p:cNvSpPr/>
-          <p:nvPr/>
-        </p:nvSpPr>
-        <p:spPr>
-          <a:xfrm>
-            <a:off x="4160520" y="1609344"/>
-            <a:ext cx="1417320" cy="274320"/>
-          </a:xfrm>
-          <a:prstGeom prst="roundRect">
-            <a:avLst>
-              <a:gd name="adj" fmla="val 16667"/>
-            </a:avLst>
-          </a:prstGeom>
-          <a:solidFill>
-            <a:srgbClr val="2A78D6"/>
-          </a:solidFill>
-          <a:ln w="12700">
-            <a:solidFill>
-              <a:srgbClr val="2A78D6"/>
-            </a:solidFill>
-            <a:prstDash val="solid"/>
-          </a:ln>
-        </p:spPr>
-      </p:sp>
-      <p:sp>
-        <p:nvSpPr>
-          <p:cNvPr id="18" name="Text 15"/>
-          <p:cNvSpPr txBox="1"/>
-          <p:nvPr/>
-        </p:nvSpPr>
-        <p:spPr>
-          <a:xfrm>
-            <a:off x="4233672" y="1609344"/>
-            <a:ext cx="1325880" cy="274320"/>
-          </a:xfrm>
-          <a:prstGeom prst="rect">
-            <a:avLst/>
-          </a:prstGeom>
-          <a:noFill/>
-          <a:ln/>
-        </p:spPr>
-        <p:txBody>
-          <a:bodyPr wrap="square" lIns="0" tIns="0" rIns="0" bIns="0" rtlCol="0" anchor="ctr"/>
-          <a:lstStyle/>
-          <a:p>
-            <a:pPr indent="0" marL="0">
-              <a:buNone/>
-            </a:pPr>
-            <a:r>
-              <a:rPr lang="en-US" sz="750" dirty="0">
-                <a:solidFill>
-                  <a:srgbClr val="FFFFFF"/>
-                </a:solidFill>
-                <a:latin typeface="Malgun Gothic" pitchFamily="34" charset="0"/>
-                <a:ea typeface="Malgun Gothic" pitchFamily="34" charset="-122"/>
-                <a:cs typeface="Malgun Gothic" pitchFamily="34" charset="-120"/>
-              </a:rPr>
-              <a:t>클릭  </a:t>
-            </a:r>
-            <a:pPr indent="0" marL="0">
-              <a:buNone/>
-            </a:pPr>
-            <a:r>
-              <a:rPr lang="en-US" sz="1050" b="1" dirty="0">
-                <a:solidFill>
-                  <a:srgbClr val="FFFFFF"/>
-                </a:solidFill>
-                <a:latin typeface="Malgun Gothic" pitchFamily="34" charset="0"/>
-                <a:ea typeface="Malgun Gothic" pitchFamily="34" charset="-122"/>
-                <a:cs typeface="Malgun Gothic" pitchFamily="34" charset="-120"/>
-              </a:rPr>
-              <a:t>388</a:t>
-            </a:r>
-            <a:endParaRPr lang="en-US" sz="750" dirty="0"/>
-          </a:p>
-        </p:txBody>
-      </p:sp>
-      <p:sp>
-        <p:nvSpPr>
-          <p:cNvPr id="19" name="Text 16"/>
-          <p:cNvSpPr txBox="1"/>
-          <p:nvPr/>
-        </p:nvSpPr>
-        <p:spPr>
-          <a:xfrm>
-            <a:off x="5641848" y="1764792"/>
-            <a:ext cx="822960" cy="182880"/>
-          </a:xfrm>
-          <a:prstGeom prst="rect">
-            <a:avLst/>
-          </a:prstGeom>
-          <a:noFill/>
-          <a:ln/>
-        </p:spPr>
-        <p:txBody>
-          <a:bodyPr wrap="square" lIns="0" tIns="0" rIns="0" bIns="0" rtlCol="0" anchor="t"/>
-          <a:lstStyle/>
-          <a:p>
-            <a:pPr indent="0" marL="0">
-              <a:buNone/>
-            </a:pPr>
-            <a:r>
-              <a:rPr lang="en-US" sz="750" b="1" dirty="0">
-                <a:solidFill>
-                  <a:srgbClr val="52514E"/>
-                </a:solidFill>
-                <a:latin typeface="Malgun Gothic" pitchFamily="34" charset="0"/>
-                <a:ea typeface="Malgun Gothic" pitchFamily="34" charset="-122"/>
-                <a:cs typeface="Malgun Gothic" pitchFamily="34" charset="-120"/>
-              </a:rPr>
-              <a:t>↓ 3.9%</a:t>
-            </a:r>
-            <a:endParaRPr lang="en-US" sz="750" dirty="0"/>
-          </a:p>
-        </p:txBody>
-      </p:sp>
-      <p:sp>
-        <p:nvSpPr>
-          <p:cNvPr id="20" name="Shape 17"/>
-          <p:cNvSpPr/>
-          <p:nvPr/>
-        </p:nvSpPr>
-        <p:spPr>
-          <a:xfrm>
-            <a:off x="4160520" y="1938528"/>
-            <a:ext cx="1417320" cy="274320"/>
-          </a:xfrm>
-          <a:prstGeom prst="roundRect">
-            <a:avLst>
-              <a:gd name="adj" fmla="val 16667"/>
-            </a:avLst>
-          </a:prstGeom>
-          <a:solidFill>
-            <a:srgbClr val="EB6834"/>
-          </a:solidFill>
-          <a:ln w="12700">
-            <a:solidFill>
-              <a:srgbClr val="EB6834"/>
-            </a:solidFill>
-            <a:prstDash val="solid"/>
-          </a:ln>
-        </p:spPr>
-      </p:sp>
-      <p:sp>
-        <p:nvSpPr>
-          <p:cNvPr id="21" name="Text 18"/>
-          <p:cNvSpPr txBox="1"/>
-          <p:nvPr/>
-        </p:nvSpPr>
-        <p:spPr>
-          <a:xfrm>
-            <a:off x="4233672" y="1938528"/>
-            <a:ext cx="1325880" cy="274320"/>
-          </a:xfrm>
-          <a:prstGeom prst="rect">
-            <a:avLst/>
-          </a:prstGeom>
-          <a:noFill/>
-          <a:ln/>
-        </p:spPr>
-        <p:txBody>
-          <a:bodyPr wrap="square" lIns="0" tIns="0" rIns="0" bIns="0" rtlCol="0" anchor="ctr"/>
-          <a:lstStyle/>
-          <a:p>
-            <a:pPr indent="0" marL="0">
-              <a:buNone/>
-            </a:pPr>
-            <a:r>
-              <a:rPr lang="en-US" sz="750" dirty="0">
-                <a:solidFill>
-                  <a:srgbClr val="FFFFFF"/>
-                </a:solidFill>
-                <a:latin typeface="Malgun Gothic" pitchFamily="34" charset="0"/>
-                <a:ea typeface="Malgun Gothic" pitchFamily="34" charset="-122"/>
-                <a:cs typeface="Malgun Gothic" pitchFamily="34" charset="-120"/>
-              </a:rPr>
-              <a:t>폼 신청  </a:t>
-            </a:r>
-            <a:pPr indent="0" marL="0">
-              <a:buNone/>
-            </a:pPr>
-            <a:r>
-              <a:rPr lang="en-US" sz="1050" b="1" dirty="0">
-                <a:solidFill>
-                  <a:srgbClr val="FFFFFF"/>
-                </a:solidFill>
-                <a:latin typeface="Malgun Gothic" pitchFamily="34" charset="0"/>
-                <a:ea typeface="Malgun Gothic" pitchFamily="34" charset="-122"/>
-                <a:cs typeface="Malgun Gothic" pitchFamily="34" charset="-120"/>
-              </a:rPr>
-              <a:t>15</a:t>
-            </a:r>
-            <a:endParaRPr lang="en-US" sz="750" dirty="0"/>
-          </a:p>
-        </p:txBody>
-      </p:sp>
-      <p:sp>
-        <p:nvSpPr>
-          <p:cNvPr id="22" name="Text 19"/>
-          <p:cNvSpPr txBox="1"/>
-          <p:nvPr/>
-        </p:nvSpPr>
-        <p:spPr>
-          <a:xfrm>
-            <a:off x="5641848" y="2093976"/>
-            <a:ext cx="822960" cy="182880"/>
-          </a:xfrm>
-          <a:prstGeom prst="rect">
-            <a:avLst/>
-          </a:prstGeom>
-          <a:noFill/>
-          <a:ln/>
-        </p:spPr>
-        <p:txBody>
-          <a:bodyPr wrap="square" lIns="0" tIns="0" rIns="0" bIns="0" rtlCol="0" anchor="t"/>
-          <a:lstStyle/>
-          <a:p>
-            <a:pPr indent="0" marL="0">
-              <a:buNone/>
-            </a:pPr>
-            <a:r>
-              <a:rPr lang="en-US" sz="750" b="1" dirty="0">
-                <a:solidFill>
-                  <a:srgbClr val="52514E"/>
-                </a:solidFill>
-                <a:latin typeface="Malgun Gothic" pitchFamily="34" charset="0"/>
-                <a:ea typeface="Malgun Gothic" pitchFamily="34" charset="-122"/>
-                <a:cs typeface="Malgun Gothic" pitchFamily="34" charset="-120"/>
-              </a:rPr>
-              <a:t>↓ 10~20%</a:t>
-            </a:r>
-            <a:endParaRPr lang="en-US" sz="750" dirty="0"/>
-          </a:p>
-        </p:txBody>
-      </p:sp>
-      <p:sp>
-        <p:nvSpPr>
-          <p:cNvPr id="23" name="Shape 20"/>
-          <p:cNvSpPr/>
-          <p:nvPr/>
-        </p:nvSpPr>
-        <p:spPr>
-          <a:xfrm>
-            <a:off x="4160520" y="2267712"/>
-            <a:ext cx="1417320" cy="274320"/>
-          </a:xfrm>
-          <a:prstGeom prst="roundRect">
-            <a:avLst>
-              <a:gd name="adj" fmla="val 16667"/>
-            </a:avLst>
-          </a:prstGeom>
-          <a:solidFill>
-            <a:srgbClr val="7AA9E6"/>
-          </a:solidFill>
-          <a:ln w="12700">
-            <a:solidFill>
-              <a:srgbClr val="7AA9E6"/>
-            </a:solidFill>
-            <a:prstDash val="solid"/>
-          </a:ln>
-        </p:spPr>
-      </p:sp>
-      <p:sp>
-        <p:nvSpPr>
-          <p:cNvPr id="24" name="Text 21"/>
-          <p:cNvSpPr txBox="1"/>
-          <p:nvPr/>
-        </p:nvSpPr>
-        <p:spPr>
-          <a:xfrm>
-            <a:off x="4233672" y="2267712"/>
-            <a:ext cx="1325880" cy="274320"/>
-          </a:xfrm>
-          <a:prstGeom prst="rect">
-            <a:avLst/>
-          </a:prstGeom>
-          <a:noFill/>
-          <a:ln/>
-        </p:spPr>
-        <p:txBody>
-          <a:bodyPr wrap="square" lIns="0" tIns="0" rIns="0" bIns="0" rtlCol="0" anchor="ctr"/>
-          <a:lstStyle/>
-          <a:p>
-            <a:pPr indent="0" marL="0">
-              <a:buNone/>
-            </a:pPr>
-            <a:r>
-              <a:rPr lang="en-US" sz="750" dirty="0">
-                <a:solidFill>
-                  <a:srgbClr val="FFFFFF"/>
-                </a:solidFill>
-                <a:latin typeface="Malgun Gothic" pitchFamily="34" charset="0"/>
-                <a:ea typeface="Malgun Gothic" pitchFamily="34" charset="-122"/>
-                <a:cs typeface="Malgun Gothic" pitchFamily="34" charset="-120"/>
-              </a:rPr>
-              <a:t>수임 추정  </a:t>
-            </a:r>
-            <a:pPr indent="0" marL="0">
-              <a:buNone/>
-            </a:pPr>
-            <a:r>
-              <a:rPr lang="en-US" sz="1050" b="1" dirty="0">
-                <a:solidFill>
-                  <a:srgbClr val="FFFFFF"/>
-                </a:solidFill>
-                <a:latin typeface="Malgun Gothic" pitchFamily="34" charset="0"/>
-                <a:ea typeface="Malgun Gothic" pitchFamily="34" charset="-122"/>
-                <a:cs typeface="Malgun Gothic" pitchFamily="34" charset="-120"/>
-              </a:rPr>
-              <a:t>1.5~3</a:t>
-            </a:r>
-            <a:endParaRPr lang="en-US" sz="750" dirty="0"/>
-          </a:p>
-        </p:txBody>
-      </p:sp>
-      <p:sp>
-        <p:nvSpPr>
-          <p:cNvPr id="25" name="Text 22"/>
-          <p:cNvSpPr txBox="1"/>
-          <p:nvPr/>
-        </p:nvSpPr>
-        <p:spPr>
-          <a:xfrm>
-            <a:off x="4160520" y="2624328"/>
-            <a:ext cx="2331720" cy="640080"/>
-          </a:xfrm>
-          <a:prstGeom prst="rect">
-            <a:avLst/>
-          </a:prstGeom>
-          <a:noFill/>
-          <a:ln/>
-        </p:spPr>
-        <p:txBody>
-          <a:bodyPr wrap="square" lIns="0" tIns="0" rIns="0" bIns="0" rtlCol="0" anchor="t"/>
-          <a:lstStyle/>
+              <a:t>측정 보완</a:t>
+            </a:r>
+            <a:endParaRPr lang="en-US" sz="900" dirty="0"/>
+          </a:p>
           <a:p>
             <a:pPr indent="0" marL="0">
               <a:spcAft>
@@ -9477,7 +8233,7 @@
               <a:buNone/>
             </a:pPr>
             <a:r>
-              <a:rPr lang="en-US" sz="750" dirty="0">
+              <a:rPr lang="en-US" sz="900" dirty="0">
                 <a:solidFill>
                   <a:srgbClr val="0B0B0B"/>
                 </a:solidFill>
@@ -9485,9 +8241,9 @@
                 <a:ea typeface="Malgun Gothic" pitchFamily="34" charset="-122"/>
                 <a:cs typeface="Malgun Gothic" pitchFamily="34" charset="-120"/>
               </a:rPr>
-              <a:t>광고 90일: 100번 눌리면 4명 신청, 수임은 1건 미만. 수임 1건당 광고비 24만~98만 원 = 수수료의 8~33% → 광고는 남음</a:t>
-            </a:r>
-            <a:endParaRPr lang="en-US" sz="750" dirty="0"/>
+              <a:t>광고 유입 → 키워드광고 유입 신청자: 네이버 전환 추적 코드 설치 (신청 → 승인 → 설치)</a:t>
+            </a:r>
+            <a:endParaRPr lang="en-US" sz="900" dirty="0"/>
           </a:p>
           <a:p>
             <a:pPr indent="0" marL="0">
@@ -9497,7 +8253,7 @@
               <a:buNone/>
             </a:pPr>
             <a:r>
-              <a:rPr lang="en-US" sz="750" dirty="0">
+              <a:rPr lang="en-US" sz="900" dirty="0">
                 <a:solidFill>
                   <a:srgbClr val="0B0B0B"/>
                 </a:solidFill>
@@ -9505,22 +8261,22 @@
                 <a:ea typeface="Malgun Gothic" pitchFamily="34" charset="-122"/>
                 <a:cs typeface="Malgun Gothic" pitchFamily="34" charset="-120"/>
               </a:rPr>
-              <a:t>변리사 기억으로 수임 10건 중 1~2건. 신청의 81%가 휴대폰 번호만 남기는 간편 신청</a:t>
-            </a:r>
-            <a:endParaRPr lang="en-US" sz="750" dirty="0"/>
-          </a:p>
-        </p:txBody>
-      </p:sp>
-      <p:sp>
-        <p:nvSpPr>
-          <p:cNvPr id="26" name="Text 23"/>
+              <a:t>전화로 바로 거는 사람: 휴대폰 번호 클릭 기록, 사이트 전용 착신 번호</a:t>
+            </a:r>
+            <a:endParaRPr lang="en-US" sz="900" dirty="0"/>
+          </a:p>
+        </p:txBody>
+      </p:sp>
+      <p:sp>
+        <p:nvSpPr>
+          <p:cNvPr id="14" name="Text 11"/>
           <p:cNvSpPr txBox="1"/>
           <p:nvPr/>
         </p:nvSpPr>
         <p:spPr>
           <a:xfrm>
-            <a:off x="4160520" y="3310128"/>
-            <a:ext cx="2331720" cy="274320"/>
+            <a:off x="4160520" y="3255264"/>
+            <a:ext cx="2331720" cy="365760"/>
           </a:xfrm>
           <a:prstGeom prst="rect">
             <a:avLst/>
@@ -9536,7 +8292,7 @@
               <a:buNone/>
             </a:pPr>
             <a:r>
-              <a:rPr lang="en-US" sz="850" b="1" dirty="0">
+              <a:rPr lang="en-US" sz="900" b="1" dirty="0">
                 <a:solidFill>
                   <a:srgbClr val="2A78D6"/>
                 </a:solidFill>
@@ -9544,15 +8300,15 @@
                 <a:ea typeface="Malgun Gothic" pitchFamily="34" charset="-122"/>
                 <a:cs typeface="Malgun Gothic" pitchFamily="34" charset="-120"/>
               </a:rPr>
-              <a:t>=&gt; action item: 신청마다 수임 여부 기록(분기 1회)</a:t>
-            </a:r>
-            <a:endParaRPr lang="en-US" sz="850" dirty="0"/>
-          </a:p>
-        </p:txBody>
-      </p:sp>
-      <p:sp>
-        <p:nvSpPr>
-          <p:cNvPr id="27" name="Text 24"/>
+              <a:t>=&gt; action item: 신청마다 수임 여부 기록</a:t>
+            </a:r>
+            <a:endParaRPr lang="en-US" sz="900" dirty="0"/>
+          </a:p>
+        </p:txBody>
+      </p:sp>
+      <p:sp>
+        <p:nvSpPr>
+          <p:cNvPr id="15" name="Text 12"/>
           <p:cNvSpPr txBox="1"/>
           <p:nvPr/>
         </p:nvSpPr>
@@ -9591,14 +8347,14 @@
       </p:sp>
       <p:sp>
         <p:nvSpPr>
-          <p:cNvPr id="28" name="Text 25"/>
+          <p:cNvPr id="16" name="Text 13"/>
           <p:cNvSpPr txBox="1"/>
           <p:nvPr/>
         </p:nvSpPr>
         <p:spPr>
           <a:xfrm>
             <a:off x="6675120" y="932688"/>
-            <a:ext cx="2057400" cy="1097280"/>
+            <a:ext cx="2057400" cy="1371600"/>
           </a:xfrm>
           <a:prstGeom prst="rect">
             <a:avLst/>
@@ -9614,7 +8370,7 @@
               <a:buNone/>
             </a:pPr>
             <a:r>
-              <a:rPr lang="en-US" sz="950" dirty="0">
+              <a:rPr lang="en-US" sz="1000" dirty="0">
                 <a:solidFill>
                   <a:srgbClr val="0B0B0B"/>
                 </a:solidFill>
@@ -9628,7 +8384,7 @@
               <a:buNone/>
             </a:pPr>
             <a:r>
-              <a:rPr lang="en-US" sz="1500" b="1" dirty="0">
+              <a:rPr lang="en-US" sz="1600" b="1" dirty="0">
                 <a:solidFill>
                   <a:srgbClr val="2A78D6"/>
                 </a:solidFill>
@@ -9638,7 +8394,24 @@
               </a:rPr>
               <a:t>300만 원</a:t>
             </a:r>
-            <a:endParaRPr lang="en-US" sz="950" dirty="0"/>
+            <a:endParaRPr lang="en-US" sz="1000" dirty="0"/>
+          </a:p>
+          <a:p>
+            <a:pPr indent="0" marL="0">
+              <a:buNone/>
+            </a:pPr>
+            <a:r>
+              <a:rPr lang="en-US" sz="850" dirty="0">
+                <a:solidFill>
+                  <a:srgbClr val="52514E"/>
+                </a:solidFill>
+                <a:latin typeface="Malgun Gothic" pitchFamily="34" charset="0"/>
+                <a:ea typeface="Malgun Gothic" pitchFamily="34" charset="-122"/>
+                <a:cs typeface="Malgun Gothic" pitchFamily="34" charset="-120"/>
+              </a:rPr>
+              <a:t>신청의 94% (2,021건)</a:t>
+            </a:r>
+            <a:endParaRPr lang="en-US" sz="1000" dirty="0"/>
           </a:p>
           <a:p>
             <a:pPr indent="0" marL="0">
@@ -9647,76 +8420,76 @@
             <a:r>
               <a:rPr lang="en-US" sz="800" dirty="0">
                 <a:solidFill>
+                  <a:srgbClr val="0B0B0B"/>
+                </a:solidFill>
+                <a:latin typeface="Malgun Gothic" pitchFamily="34" charset="0"/>
+                <a:ea typeface="Malgun Gothic" pitchFamily="34" charset="-122"/>
+                <a:cs typeface="Malgun Gothic" pitchFamily="34" charset="-120"/>
+              </a:rPr>
+              <a:t> </a:t>
+            </a:r>
+            <a:endParaRPr lang="en-US" sz="1000" dirty="0"/>
+          </a:p>
+          <a:p>
+            <a:pPr indent="0" marL="0">
+              <a:buNone/>
+            </a:pPr>
+            <a:r>
+              <a:rPr lang="en-US" sz="1000" dirty="0">
+                <a:solidFill>
+                  <a:srgbClr val="0B0B0B"/>
+                </a:solidFill>
+                <a:latin typeface="Malgun Gothic" pitchFamily="34" charset="0"/>
+                <a:ea typeface="Malgun Gothic" pitchFamily="34" charset="-122"/>
+                <a:cs typeface="Malgun Gothic" pitchFamily="34" charset="-120"/>
+              </a:rPr>
+              <a:t>분쟁  </a:t>
+            </a:r>
+            <a:pPr indent="0" marL="0">
+              <a:buNone/>
+            </a:pPr>
+            <a:r>
+              <a:rPr lang="en-US" sz="1600" b="1" dirty="0">
+                <a:solidFill>
+                  <a:srgbClr val="EB6834"/>
+                </a:solidFill>
+                <a:latin typeface="Malgun Gothic" pitchFamily="34" charset="0"/>
+                <a:ea typeface="Malgun Gothic" pitchFamily="34" charset="-122"/>
+                <a:cs typeface="Malgun Gothic" pitchFamily="34" charset="-120"/>
+              </a:rPr>
+              <a:t>2,000만 원</a:t>
+            </a:r>
+            <a:endParaRPr lang="en-US" sz="1000" dirty="0"/>
+          </a:p>
+          <a:p>
+            <a:pPr indent="0" marL="0">
+              <a:buNone/>
+            </a:pPr>
+            <a:r>
+              <a:rPr lang="en-US" sz="850" dirty="0">
+                <a:solidFill>
                   <a:srgbClr val="52514E"/>
                 </a:solidFill>
                 <a:latin typeface="Malgun Gothic" pitchFamily="34" charset="0"/>
                 <a:ea typeface="Malgun Gothic" pitchFamily="34" charset="-122"/>
                 <a:cs typeface="Malgun Gothic" pitchFamily="34" charset="-120"/>
               </a:rPr>
-              <a:t>신청의 94% (2,021건)</a:t>
-            </a:r>
-            <a:endParaRPr lang="en-US" sz="950" dirty="0"/>
-          </a:p>
-          <a:p>
-            <a:pPr indent="0" marL="0">
-              <a:buNone/>
-            </a:pPr>
-            <a:r>
-              <a:rPr lang="en-US" sz="950" dirty="0">
-                <a:solidFill>
-                  <a:srgbClr val="0B0B0B"/>
-                </a:solidFill>
-                <a:latin typeface="Malgun Gothic" pitchFamily="34" charset="0"/>
-                <a:ea typeface="Malgun Gothic" pitchFamily="34" charset="-122"/>
-                <a:cs typeface="Malgun Gothic" pitchFamily="34" charset="-120"/>
-              </a:rPr>
-              <a:t>분쟁  </a:t>
-            </a:r>
-            <a:pPr indent="0" marL="0">
-              <a:buNone/>
-            </a:pPr>
-            <a:r>
-              <a:rPr lang="en-US" sz="1500" b="1" dirty="0">
-                <a:solidFill>
-                  <a:srgbClr val="EB6834"/>
-                </a:solidFill>
-                <a:latin typeface="Malgun Gothic" pitchFamily="34" charset="0"/>
-                <a:ea typeface="Malgun Gothic" pitchFamily="34" charset="-122"/>
-                <a:cs typeface="Malgun Gothic" pitchFamily="34" charset="-120"/>
-              </a:rPr>
-              <a:t>2,000만 원</a:t>
-            </a:r>
-            <a:endParaRPr lang="en-US" sz="950" dirty="0"/>
-          </a:p>
-          <a:p>
-            <a:pPr indent="0" marL="0">
-              <a:buNone/>
-            </a:pPr>
-            <a:r>
-              <a:rPr lang="en-US" sz="800" dirty="0">
-                <a:solidFill>
-                  <a:srgbClr val="52514E"/>
-                </a:solidFill>
-                <a:latin typeface="Malgun Gothic" pitchFamily="34" charset="0"/>
-                <a:ea typeface="Malgun Gothic" pitchFamily="34" charset="-122"/>
-                <a:cs typeface="Malgun Gothic" pitchFamily="34" charset="-120"/>
-              </a:rPr>
               <a:t>신청의 6% (120건)</a:t>
             </a:r>
-            <a:endParaRPr lang="en-US" sz="950" dirty="0"/>
-          </a:p>
-        </p:txBody>
-      </p:sp>
-      <p:sp>
-        <p:nvSpPr>
-          <p:cNvPr id="29" name="Text 26"/>
+            <a:endParaRPr lang="en-US" sz="1000" dirty="0"/>
+          </a:p>
+        </p:txBody>
+      </p:sp>
+      <p:sp>
+        <p:nvSpPr>
+          <p:cNvPr id="17" name="Text 14"/>
           <p:cNvSpPr txBox="1"/>
           <p:nvPr/>
         </p:nvSpPr>
         <p:spPr>
           <a:xfrm>
-            <a:off x="6675120" y="2075688"/>
-            <a:ext cx="2057400" cy="731520"/>
+            <a:off x="6675120" y="3035808"/>
+            <a:ext cx="2057400" cy="585216"/>
           </a:xfrm>
           <a:prstGeom prst="rect">
             <a:avLst/>
@@ -9729,72 +8502,10 @@
           <a:lstStyle/>
           <a:p>
             <a:pPr indent="0" marL="0">
-              <a:spcAft>
-                <a:spcPts val="300"/>
-              </a:spcAft>
-              <a:buNone/>
-            </a:pPr>
-            <a:r>
-              <a:rPr lang="en-US" sz="750" dirty="0">
-                <a:solidFill>
-                  <a:srgbClr val="0B0B0B"/>
-                </a:solidFill>
-                <a:latin typeface="Malgun Gothic" pitchFamily="34" charset="0"/>
-                <a:ea typeface="Malgun Gothic" pitchFamily="34" charset="-122"/>
-                <a:cs typeface="Malgun Gothic" pitchFamily="34" charset="-120"/>
-              </a:rPr>
-              <a:t>수수료 7배라 연 매출은 출원과 비슷하거나 더 큼 (전환율 같다고 가정)</a:t>
-            </a:r>
-            <a:endParaRPr lang="en-US" sz="750" dirty="0"/>
-          </a:p>
-          <a:p>
-            <a:pPr indent="0" marL="0">
-              <a:spcAft>
-                <a:spcPts val="300"/>
-              </a:spcAft>
-              <a:buNone/>
-            </a:pPr>
-            <a:r>
-              <a:rPr lang="en-US" sz="750" dirty="0">
-                <a:solidFill>
-                  <a:srgbClr val="0B0B0B"/>
-                </a:solidFill>
-                <a:latin typeface="Malgun Gothic" pitchFamily="34" charset="0"/>
-                <a:ea typeface="Malgun Gothic" pitchFamily="34" charset="-122"/>
-                <a:cs typeface="Malgun Gothic" pitchFamily="34" charset="-120"/>
-              </a:rPr>
-              <a:t>분쟁 검색자가 가장 짧게 머묾 → 페이지 문제 가능성</a:t>
-            </a:r>
-            <a:endParaRPr lang="en-US" sz="750" dirty="0"/>
-          </a:p>
-        </p:txBody>
-      </p:sp>
-      <p:sp>
-        <p:nvSpPr>
-          <p:cNvPr id="30" name="Text 27"/>
-          <p:cNvSpPr txBox="1"/>
-          <p:nvPr/>
-        </p:nvSpPr>
-        <p:spPr>
-          <a:xfrm>
-            <a:off x="6675120" y="3035808"/>
-            <a:ext cx="2057400" cy="548640"/>
-          </a:xfrm>
-          <a:prstGeom prst="rect">
-            <a:avLst/>
-          </a:prstGeom>
-          <a:noFill/>
-          <a:ln/>
-        </p:spPr>
-        <p:txBody>
-          <a:bodyPr wrap="square" lIns="0" tIns="0" rIns="0" bIns="0" rtlCol="0" anchor="t"/>
-          <a:lstStyle/>
-          <a:p>
-            <a:pPr indent="0" marL="0">
-              <a:buNone/>
-            </a:pPr>
-            <a:r>
-              <a:rPr lang="en-US" sz="850" b="1" dirty="0">
+              <a:buNone/>
+            </a:pPr>
+            <a:r>
+              <a:rPr lang="en-US" sz="900" b="1" dirty="0">
                 <a:solidFill>
                   <a:srgbClr val="2A78D6"/>
                 </a:solidFill>
@@ -9802,230 +8513,15 @@
                 <a:ea typeface="Malgun Gothic" pitchFamily="34" charset="-122"/>
                 <a:cs typeface="Malgun Gothic" pitchFamily="34" charset="-120"/>
               </a:rPr>
-              <a:t>=&gt; action item: 분쟁 페이지를 리뉴얼 우선순위에, 폼보다 전화. 분쟁 광고는 줄이지 않음</a:t>
-            </a:r>
-            <a:endParaRPr lang="en-US" sz="850" dirty="0"/>
-          </a:p>
-        </p:txBody>
-      </p:sp>
-      <p:sp>
-        <p:nvSpPr>
-          <p:cNvPr id="31" name="Shape 28"/>
-          <p:cNvSpPr/>
-          <p:nvPr/>
-        </p:nvSpPr>
-        <p:spPr>
-          <a:xfrm>
-            <a:off x="411480" y="3657600"/>
-            <a:ext cx="8321040" cy="457200"/>
-          </a:xfrm>
-          <a:prstGeom prst="rect">
-            <a:avLst/>
-          </a:prstGeom>
-          <a:solidFill>
-            <a:srgbClr val="EEF4FB"/>
-          </a:solidFill>
-          <a:ln w="12700">
-            <a:solidFill>
-              <a:srgbClr val="EEF4FB"/>
-            </a:solidFill>
-            <a:prstDash val="solid"/>
-          </a:ln>
-        </p:spPr>
-      </p:sp>
-      <p:sp>
-        <p:nvSpPr>
-          <p:cNvPr id="32" name="Text 29"/>
-          <p:cNvSpPr txBox="1"/>
-          <p:nvPr/>
-        </p:nvSpPr>
-        <p:spPr>
-          <a:xfrm>
-            <a:off x="521208" y="3657600"/>
-            <a:ext cx="8101584" cy="457200"/>
-          </a:xfrm>
-          <a:prstGeom prst="rect">
-            <a:avLst/>
-          </a:prstGeom>
-          <a:noFill/>
-          <a:ln/>
-        </p:spPr>
-        <p:txBody>
-          <a:bodyPr wrap="square" lIns="0" tIns="0" rIns="0" bIns="0" rtlCol="0" anchor="ctr"/>
-          <a:lstStyle/>
-          <a:p>
-            <a:pPr indent="0" marL="0">
-              <a:buNone/>
-            </a:pPr>
-            <a:r>
-              <a:rPr lang="en-US" sz="750" b="1" dirty="0">
-                <a:solidFill>
-                  <a:srgbClr val="2A78D6"/>
-                </a:solidFill>
-                <a:latin typeface="Malgun Gothic" pitchFamily="34" charset="0"/>
-                <a:ea typeface="Malgun Gothic" pitchFamily="34" charset="-122"/>
-                <a:cs typeface="Malgun Gothic" pitchFamily="34" charset="-120"/>
-              </a:rPr>
-              <a:t>측정 보완  </a:t>
-            </a:r>
-            <a:pPr indent="0" marL="0">
-              <a:buNone/>
-            </a:pPr>
-            <a:r>
-              <a:rPr lang="en-US" sz="750" dirty="0">
-                <a:solidFill>
-                  <a:srgbClr val="0B0B0B"/>
-                </a:solidFill>
-                <a:latin typeface="Malgun Gothic" pitchFamily="34" charset="0"/>
-                <a:ea typeface="Malgun Gothic" pitchFamily="34" charset="-122"/>
-                <a:cs typeface="Malgun Gothic" pitchFamily="34" charset="-120"/>
-              </a:rPr>
-              <a:t>광고 유입 → 신청: 네이버 전환 추적 코드(신청 → 승인 → 설치) · 광고 외 경로 → 신청: GA4 폼 이벤트 · 전화로 바로 거는 사람: 휴대폰 번호 클릭 기록, 사이트 전용 착신 번호 · 신청 → 수임: 신청 글에 수임 여부 기록</a:t>
-            </a:r>
-            <a:endParaRPr lang="en-US" sz="750" dirty="0"/>
-          </a:p>
-          <a:p>
-            <a:pPr indent="0" marL="0">
-              <a:buNone/>
-            </a:pPr>
-            <a:r>
-              <a:rPr lang="en-US" sz="750" b="1" dirty="0">
-                <a:solidFill>
-                  <a:srgbClr val="52514E"/>
-                </a:solidFill>
-                <a:latin typeface="Malgun Gothic" pitchFamily="34" charset="0"/>
-                <a:ea typeface="Malgun Gothic" pitchFamily="34" charset="-122"/>
-                <a:cs typeface="Malgun Gothic" pitchFamily="34" charset="-120"/>
-              </a:rPr>
-              <a:t>한계  </a:t>
-            </a:r>
-            <a:pPr indent="0" marL="0">
-              <a:buNone/>
-            </a:pPr>
-            <a:r>
-              <a:rPr lang="en-US" sz="750" dirty="0">
-                <a:solidFill>
-                  <a:srgbClr val="0B0B0B"/>
-                </a:solidFill>
-                <a:latin typeface="Malgun Gothic" pitchFamily="34" charset="0"/>
-                <a:ea typeface="Malgun Gothic" pitchFamily="34" charset="-122"/>
-                <a:cs typeface="Malgun Gothic" pitchFamily="34" charset="-120"/>
-              </a:rPr>
-              <a:t>표본 작음(90일 신청 15, 광고 유입 120) · 봇 제거는 추정 · 원인은 다음 중단만 확인, 블로그·검색은 추정 · 수임률·수수료는 변리사 기억</a:t>
-            </a:r>
-            <a:endParaRPr lang="en-US" sz="750" dirty="0"/>
-          </a:p>
-        </p:txBody>
-      </p:sp>
-      <p:sp>
-        <p:nvSpPr>
-          <p:cNvPr id="33" name="Shape 30"/>
-          <p:cNvSpPr/>
-          <p:nvPr/>
-        </p:nvSpPr>
-        <p:spPr>
-          <a:xfrm>
-            <a:off x="411480" y="4169664"/>
-            <a:ext cx="8321040" cy="256032"/>
-          </a:xfrm>
-          <a:prstGeom prst="rect">
-            <a:avLst/>
-          </a:prstGeom>
-          <a:solidFill>
-            <a:srgbClr val="FFF3C4"/>
-          </a:solidFill>
-          <a:ln w="12700">
-            <a:solidFill>
-              <a:srgbClr val="E0C060"/>
-            </a:solidFill>
-            <a:prstDash val="solid"/>
-          </a:ln>
-        </p:spPr>
-      </p:sp>
-      <p:sp>
-        <p:nvSpPr>
-          <p:cNvPr id="34" name="Text 31"/>
-          <p:cNvSpPr txBox="1"/>
-          <p:nvPr/>
-        </p:nvSpPr>
-        <p:spPr>
-          <a:xfrm>
-            <a:off x="521208" y="4169664"/>
-            <a:ext cx="8101584" cy="256032"/>
-          </a:xfrm>
-          <a:prstGeom prst="rect">
-            <a:avLst/>
-          </a:prstGeom>
-          <a:noFill/>
-          <a:ln/>
-        </p:spPr>
-        <p:txBody>
-          <a:bodyPr wrap="square" lIns="0" tIns="0" rIns="0" bIns="0" rtlCol="0" anchor="ctr"/>
-          <a:lstStyle/>
-          <a:p>
-            <a:pPr indent="0" marL="0">
-              <a:buNone/>
-            </a:pPr>
-            <a:r>
-              <a:rPr lang="en-US" sz="800" b="1" dirty="0">
-                <a:solidFill>
-                  <a:srgbClr val="0B0B0B"/>
-                </a:solidFill>
-                <a:latin typeface="Malgun Gothic" pitchFamily="34" charset="0"/>
-                <a:ea typeface="Malgun Gothic" pitchFamily="34" charset="-122"/>
-                <a:cs typeface="Malgun Gothic" pitchFamily="34" charset="-120"/>
-              </a:rPr>
-              <a:t>사용자 확인  </a:t>
-            </a:r>
-            <a:pPr indent="0" marL="0">
-              <a:buNone/>
-            </a:pPr>
-            <a:r>
-              <a:rPr lang="en-US" sz="800" dirty="0">
-                <a:solidFill>
-                  <a:srgbClr val="0B0B0B"/>
-                </a:solidFill>
-                <a:latin typeface="Malgun Gothic" pitchFamily="34" charset="0"/>
-                <a:ea typeface="Malgun Gothic" pitchFamily="34" charset="-122"/>
-                <a:cs typeface="Malgun Gothic" pitchFamily="34" charset="-120"/>
-              </a:rPr>
-              <a:t>변리사가 리포트를 읽고 action item을 반영하겠다고 답함      </a:t>
-            </a:r>
-            <a:pPr indent="0" marL="0">
-              <a:buNone/>
-            </a:pPr>
-            <a:r>
-              <a:rPr lang="en-US" sz="800" b="1" dirty="0">
-                <a:solidFill>
-                  <a:srgbClr val="0B0B0B"/>
-                </a:solidFill>
-                <a:latin typeface="Malgun Gothic" pitchFamily="34" charset="0"/>
-                <a:ea typeface="Malgun Gothic" pitchFamily="34" charset="-122"/>
-                <a:cs typeface="Malgun Gothic" pitchFamily="34" charset="-120"/>
-              </a:rPr>
-              <a:t>AI 사용  </a:t>
-            </a:r>
-            <a:pPr indent="0" marL="0">
-              <a:buNone/>
-            </a:pPr>
-            <a:r>
-              <a:rPr lang="en-US" sz="800" dirty="0">
-                <a:solidFill>
-                  <a:srgbClr val="0B0B0B"/>
-                </a:solidFill>
-                <a:latin typeface="Malgun Gothic" pitchFamily="34" charset="0"/>
-                <a:ea typeface="Malgun Gothic" pitchFamily="34" charset="-122"/>
-                <a:cs typeface="Malgun Gothic" pitchFamily="34" charset="-120"/>
-              </a:rPr>
-              <a:t>코드·차트·초안은 Claude Code, 문제 정의·구조·검증은 사람. 자세한 내용은 GitHub README</a:t>
-            </a:r>
-            <a:endParaRPr lang="en-US" sz="800" dirty="0"/>
-          </a:p>
-        </p:txBody>
-      </p:sp>
-      <p:sp>
-        <p:nvSpPr>
-          <p:cNvPr id="35" name="Shape 32"/>
+              <a:t>=&gt; action item: 분쟁 페이지를 리뉴얼 우선순위에, 폼보다 전화 → 분쟁 광고는 줄이지 않음</a:t>
+            </a:r>
+            <a:endParaRPr lang="en-US" sz="900" dirty="0"/>
+          </a:p>
+        </p:txBody>
+      </p:sp>
+      <p:sp>
+        <p:nvSpPr>
+          <p:cNvPr id="18" name="Shape 15"/>
           <p:cNvSpPr/>
           <p:nvPr/>
         </p:nvSpPr>
@@ -10048,7 +8544,7 @@
       </p:sp>
       <p:sp>
         <p:nvSpPr>
-          <p:cNvPr id="36" name="Text 33"/>
+          <p:cNvPr id="19" name="Text 16"/>
           <p:cNvSpPr txBox="1"/>
           <p:nvPr/>
         </p:nvSpPr>
@@ -10079,7 +8575,7 @@
                 <a:ea typeface="Malgun Gothic" pitchFamily="34" charset="-122"/>
                 <a:cs typeface="Malgun Gothic" pitchFamily="34" charset="-120"/>
               </a:rPr>
-              <a:t>출처: 신청 알림 문자·게시판 2,141건, 서버 실제 방문, 네이버 광고 90일 + 같은 기간 게시판 15건, GA4 광고 유입 120세션(2026-09), Clarity 녹화 5건, 변리사 답(수임률·수수료)</a:t>
+              <a:t>출처: 신청 알림 문자, 신청 게시판 2,174건, 서버 실제 방문, GA4 광고 유입 120세션(2026-09-02 ~ 10-01), 변리사 답(수임률·수수료) · 전처리: 게시판은 스팸 10건·휴대폰 형식 아님 23건 제외 → 2,141건</a:t>
             </a:r>
             <a:endParaRPr lang="en-US" sz="800" dirty="0"/>
           </a:p>

--- a/slides-v2.pptx
+++ b/slides-v2.pptx
@@ -6670,7 +6670,7 @@
                 <a:ea typeface="Malgun Gothic" pitchFamily="34" charset="-122"/>
                 <a:cs typeface="Malgun Gothic" pitchFamily="34" charset="-120"/>
               </a:rPr>
-              <a:t>방문 644(2020년 수준) × 신청률 4.6% = 신청 연 30건</a:t>
+              <a:t>되찾을 방문 = 2020년 644 − 지금 131(2026) = 513</a:t>
             </a:r>
             <a:endParaRPr lang="en-US" sz="750" dirty="0"/>
           </a:p>
@@ -6690,7 +6690,7 @@
                 <a:ea typeface="Malgun Gothic" pitchFamily="34" charset="-122"/>
                 <a:cs typeface="Malgun Gothic" pitchFamily="34" charset="-120"/>
               </a:rPr>
-              <a:t>30건 × 수임률 10~20% = 수임 3~6건</a:t>
+              <a:t>513 × 신청률 4.6% = 신청 연 24건</a:t>
             </a:r>
             <a:endParaRPr lang="en-US" sz="750" dirty="0"/>
           </a:p>
@@ -6710,7 +6710,7 @@
                 <a:ea typeface="Malgun Gothic" pitchFamily="34" charset="-122"/>
                 <a:cs typeface="Malgun Gothic" pitchFamily="34" charset="-120"/>
               </a:rPr>
-              <a:t>3~6건 × 수수료 300만 원 = 매출 연 900만~1,800만 원</a:t>
+              <a:t>24건 × 수임률 10~20% = 수임 2~5건</a:t>
             </a:r>
             <a:endParaRPr lang="en-US" sz="750" dirty="0"/>
           </a:p>
@@ -6730,7 +6730,27 @@
                 <a:ea typeface="Malgun Gothic" pitchFamily="34" charset="-122"/>
                 <a:cs typeface="Malgun Gothic" pitchFamily="34" charset="-120"/>
               </a:rPr>
-              <a:t>비용: 644클릭 × 네이버 클릭당 1,891원 = 연 약 120만 원</a:t>
+              <a:t>2~5건 × 수수료 300만 원 = 매출 연 700만~1,400만 원</a:t>
+            </a:r>
+            <a:endParaRPr lang="en-US" sz="750" dirty="0"/>
+          </a:p>
+          <a:p>
+            <a:pPr indent="0" marL="0">
+              <a:spcAft>
+                <a:spcPts val="300"/>
+              </a:spcAft>
+              <a:buNone/>
+            </a:pPr>
+            <a:r>
+              <a:rPr lang="en-US" sz="750" dirty="0">
+                <a:solidFill>
+                  <a:srgbClr val="0B0B0B"/>
+                </a:solidFill>
+                <a:latin typeface="Malgun Gothic" pitchFamily="34" charset="0"/>
+                <a:ea typeface="Malgun Gothic" pitchFamily="34" charset="-122"/>
+                <a:cs typeface="Malgun Gothic" pitchFamily="34" charset="-120"/>
+              </a:rPr>
+              <a:t>비용: 513클릭 × 네이버 클릭당 1,891원 = 연 약 97만 원</a:t>
             </a:r>
             <a:endParaRPr lang="en-US" sz="750" dirty="0"/>
           </a:p>
